--- a/project_42_face_attendance_antispoofing/presentations/project_presentation.pptx
+++ b/project_42_face_attendance_antispoofing/presentations/project_presentation.pptx
@@ -13,6 +13,13 @@
     <p:sldId id="261" r:id="rId12"/>
     <p:sldId id="262" r:id="rId13"/>
     <p:sldId id="263" r:id="rId14"/>
+    <p:sldId id="264" r:id="rId15"/>
+    <p:sldId id="265" r:id="rId16"/>
+    <p:sldId id="266" r:id="rId17"/>
+    <p:sldId id="267" r:id="rId18"/>
+    <p:sldId id="268" r:id="rId19"/>
+    <p:sldId id="269" r:id="rId20"/>
+    <p:sldId id="270" r:id="rId21"/>
   </p:sldIdLst>
   <p:sldSz cx="12191695" cy="6858000" type="screen4x3"/>
   <p:notesSz cx="6858000" cy="9144000"/>
@@ -3113,7 +3120,9 @@
             <a:srgbClr val="0F172A"/>
           </a:solidFill>
           <a:ln>
-            <a:noFill/>
+            <a:solidFill>
+              <a:srgbClr val="0F172A"/>
+            </a:solidFill>
           </a:ln>
         </p:spPr>
         <p:style>
@@ -3146,8 +3155,8 @@
         </p:nvSpPr>
         <p:spPr>
           <a:xfrm>
-            <a:off x="1097280" y="1645920"/>
-            <a:ext cx="10058400" cy="3474720"/>
+            <a:off x="914400" y="1828800"/>
+            <a:ext cx="10362895" cy="3200400"/>
           </a:xfrm>
           <a:prstGeom prst="rect">
             <a:avLst/>
@@ -3160,15 +3169,29 @@
           </a:bodyPr>
           <a:lstStyle/>
           <a:p>
+            <a:r>
+              <a:rPr b="1" sz="1400">
+                <a:solidFill>
+                  <a:srgbClr val="6366F1"/>
+                </a:solidFill>
+              </a:rPr>
+              <a:t>AI BIOMETRICS &amp; CYBERSECURITY • PROJECT-042</a:t>
+            </a:r>
+          </a:p>
+          <a:p>
             <a:pPr>
-              <a:defRPr sz="1400" b="1">
-                <a:solidFill>
-                  <a:srgbClr val="38BDF8"/>
-                </a:solidFill>
-              </a:defRPr>
+              <a:spcBef>
+                <a:spcPts val="1200"/>
+              </a:spcBef>
             </a:pPr>
             <a:r>
-              <a:t>PROJECT 42 OF 55  •  RESEARCH &amp; IMPLEMENTATION DECK</a:t>
+              <a:rPr b="1" sz="3600">
+                <a:solidFill>
+                  <a:srgbClr val="FFFFFF"/>
+                </a:solidFill>
+              </a:rPr>
+              <a:t>AI-Driven Face Recognition Attendance
+&amp; Anti-Spoofing Architecture</a:t>
             </a:r>
           </a:p>
           <a:p>
@@ -3176,29 +3199,2270 @@
               <a:spcBef>
                 <a:spcPts val="1400"/>
               </a:spcBef>
-              <a:defRPr sz="3200" b="1">
-                <a:solidFill>
-                  <a:srgbClr val="FFFFFF"/>
-                </a:solidFill>
-              </a:defRPr>
             </a:pPr>
             <a:r>
-              <a:t>AUTOMATED ATTENDANCE MONITORING USING FACE RECOGNITION AND ANTI-SPOOFING TECHNIQUES</a:t>
+              <a:rPr sz="1600">
+                <a:solidFill>
+                  <a:srgbClr val="CBD5E1"/>
+                </a:solidFill>
+              </a:rPr>
+              <a:t>512-D ArcFace Deep Feature Embeddings, Multi-Target Texture Micro-Tremor Regressor &amp; SHA-256 Chained Audit Ledger</a:t>
+            </a:r>
+          </a:p>
+        </p:txBody>
+      </p:sp>
+    </p:spTree>
+  </p:cSld>
+  <p:clrMapOvr>
+    <a:masterClrMapping/>
+  </p:clrMapOvr>
+</p:sld>
+</file>
+
+<file path=ppt/slides/slide10.xml><?xml version="1.0" encoding="utf-8"?>
+<p:sld xmlns:a="http://schemas.openxmlformats.org/drawingml/2006/main" xmlns:p="http://schemas.openxmlformats.org/presentationml/2006/main" xmlns:r="http://schemas.openxmlformats.org/officeDocument/2006/relationships">
+  <p:cSld>
+    <p:spTree>
+      <p:nvGrpSpPr>
+        <p:cNvPr id="1" name=""/>
+        <p:cNvGrpSpPr/>
+        <p:nvPr/>
+      </p:nvGrpSpPr>
+      <p:grpSpPr/>
+      <p:sp>
+        <p:nvSpPr>
+          <p:cNvPr id="2" name="TextBox 1"/>
+          <p:cNvSpPr txBox="1"/>
+          <p:nvPr/>
+        </p:nvSpPr>
+        <p:spPr>
+          <a:xfrm>
+            <a:off x="731520" y="365760"/>
+            <a:ext cx="10728655" cy="822960"/>
+          </a:xfrm>
+          <a:prstGeom prst="rect">
+            <a:avLst/>
+          </a:prstGeom>
+          <a:noFill/>
+        </p:spPr>
+        <p:txBody>
+          <a:bodyPr wrap="square" lIns="0" tIns="0" rIns="0" bIns="0">
+            <a:spAutoFit/>
+          </a:bodyPr>
+          <a:lstStyle/>
+          <a:p>
+            <a:r>
+              <a:rPr b="1" sz="1000">
+                <a:solidFill>
+                  <a:srgbClr val="6366F1"/>
+                </a:solidFill>
+              </a:rPr>
+              <a:t>ADVERSARIAL DEFENSE • PROJECT-042</a:t>
+            </a:r>
+          </a:p>
+          <a:p>
+            <a:r>
+              <a:rPr b="1" sz="2000">
+                <a:solidFill>
+                  <a:srgbClr val="0F172A"/>
+                </a:solidFill>
+              </a:rPr>
+              <a:t>Presentation Attack Defense: 2D High-Res Print Photo</a:t>
+            </a:r>
+          </a:p>
+        </p:txBody>
+      </p:sp>
+      <p:pic>
+        <p:nvPicPr>
+          <p:cNvPr id="3" name="Picture 2" descr="05_print_attack_2d_blocked.png"/>
+          <p:cNvPicPr>
+            <a:picLocks noChangeAspect="1"/>
+          </p:cNvPicPr>
+          <p:nvPr/>
+        </p:nvPicPr>
+        <p:blipFill>
+          <a:blip r:embed="rId2"/>
+          <a:stretch>
+            <a:fillRect/>
+          </a:stretch>
+        </p:blipFill>
+        <p:spPr>
+          <a:xfrm>
+            <a:off x="731520" y="1371600"/>
+            <a:ext cx="6583680" cy="4937760"/>
+          </a:xfrm>
+          <a:prstGeom prst="rect">
+            <a:avLst/>
+          </a:prstGeom>
+        </p:spPr>
+      </p:pic>
+      <p:sp>
+        <p:nvSpPr>
+          <p:cNvPr id="4" name="Rectangle 3"/>
+          <p:cNvSpPr/>
+          <p:nvPr/>
+        </p:nvSpPr>
+        <p:spPr>
+          <a:xfrm>
+            <a:off x="7589520" y="1371600"/>
+            <a:ext cx="3840480" cy="4937760"/>
+          </a:xfrm>
+          <a:prstGeom prst="rect">
+            <a:avLst/>
+          </a:prstGeom>
+          <a:solidFill>
+            <a:srgbClr val="FFFFFF"/>
+          </a:solidFill>
+          <a:ln w="12700">
+            <a:solidFill>
+              <a:srgbClr val="E2E8F0"/>
+            </a:solidFill>
+          </a:ln>
+        </p:spPr>
+        <p:style>
+          <a:lnRef idx="1">
+            <a:schemeClr val="accent1"/>
+          </a:lnRef>
+          <a:fillRef idx="3">
+            <a:schemeClr val="accent1"/>
+          </a:fillRef>
+          <a:effectRef idx="2">
+            <a:schemeClr val="accent1"/>
+          </a:effectRef>
+          <a:fontRef idx="minor">
+            <a:schemeClr val="lt1"/>
+          </a:fontRef>
+        </p:style>
+        <p:txBody>
+          <a:bodyPr rtlCol="0" anchor="ctr"/>
+          <a:lstStyle/>
+          <a:p>
+            <a:pPr algn="ctr"/>
+          </a:p>
+        </p:txBody>
+      </p:sp>
+      <p:sp>
+        <p:nvSpPr>
+          <p:cNvPr id="5" name="TextBox 4"/>
+          <p:cNvSpPr txBox="1"/>
+          <p:nvPr/>
+        </p:nvSpPr>
+        <p:spPr>
+          <a:xfrm>
+            <a:off x="7772400" y="1554480"/>
+            <a:ext cx="3474720" cy="4572000"/>
+          </a:xfrm>
+          <a:prstGeom prst="rect">
+            <a:avLst/>
+          </a:prstGeom>
+          <a:noFill/>
+        </p:spPr>
+        <p:txBody>
+          <a:bodyPr wrap="square" lIns="0" tIns="0" rIns="0" bIns="0">
+            <a:spAutoFit/>
+          </a:bodyPr>
+          <a:lstStyle/>
+          <a:p>
+            <a:r>
+              <a:rPr b="1" sz="1400">
+                <a:solidFill>
+                  <a:srgbClr val="0F172A"/>
+                </a:solidFill>
+              </a:rPr>
+              <a:t>Print Attack Defense Breakdown</a:t>
             </a:r>
           </a:p>
           <a:p>
             <a:pPr>
               <a:spcBef>
-                <a:spcPts val="1200"/>
+                <a:spcPts val="600"/>
               </a:spcBef>
-              <a:defRPr sz="1600">
-                <a:solidFill>
-                  <a:srgbClr val="CBD5E1"/>
-                </a:solidFill>
-              </a:defRPr>
             </a:pPr>
             <a:r>
-              <a:t>Enterprise-Grade AI Architecture, Machine Learning Pipeline &amp; Deployment Framework</a:t>
+              <a:rPr b="1" sz="1100">
+                <a:solidFill>
+                  <a:srgbClr val="6366F1"/>
+                </a:solidFill>
+              </a:rPr>
+              <a:t>• </a:t>
+            </a:r>
+            <a:r>
+              <a:rPr b="1" sz="1100">
+                <a:solidFill>
+                  <a:srgbClr val="1E293B"/>
+                </a:solidFill>
+              </a:rPr>
+              <a:t>Access Decision: REJECTED: </a:t>
+            </a:r>
+            <a:r>
+              <a:rPr sz="1100">
+                <a:solidFill>
+                  <a:srgbClr val="64748B"/>
+                </a:solidFill>
+              </a:rPr>
+              <a:t>Turnstile locked immediately; presentation attack incident logged to security console.</a:t>
+            </a:r>
+          </a:p>
+          <a:p>
+            <a:pPr>
+              <a:spcBef>
+                <a:spcPts val="600"/>
+              </a:spcBef>
+            </a:pPr>
+            <a:r>
+              <a:rPr b="1" sz="1100">
+                <a:solidFill>
+                  <a:srgbClr val="6366F1"/>
+                </a:solidFill>
+              </a:rPr>
+              <a:t>• </a:t>
+            </a:r>
+            <a:r>
+              <a:rPr b="1" sz="1100">
+                <a:solidFill>
+                  <a:srgbClr val="1E293B"/>
+                </a:solidFill>
+              </a:rPr>
+              <a:t>Spoof Risk Confidence: 94.5%: </a:t>
+            </a:r>
+            <a:r>
+              <a:rPr sz="1100">
+                <a:solidFill>
+                  <a:srgbClr val="64748B"/>
+                </a:solidFill>
+              </a:rPr>
+              <a:t>High-confidence detection of planar paper reflection and absence of skin micro-texture.</a:t>
+            </a:r>
+          </a:p>
+          <a:p>
+            <a:pPr>
+              <a:spcBef>
+                <a:spcPts val="600"/>
+              </a:spcBef>
+            </a:pPr>
+            <a:r>
+              <a:rPr b="1" sz="1100">
+                <a:solidFill>
+                  <a:srgbClr val="6366F1"/>
+                </a:solidFill>
+              </a:rPr>
+              <a:t>• </a:t>
+            </a:r>
+            <a:r>
+              <a:rPr b="1" sz="1100">
+                <a:solidFill>
+                  <a:srgbClr val="1E293B"/>
+                </a:solidFill>
+              </a:rPr>
+              <a:t>Flat Optical Flow (&lt;0.07): </a:t>
+            </a:r>
+            <a:r>
+              <a:rPr sz="1100">
+                <a:solidFill>
+                  <a:srgbClr val="64748B"/>
+                </a:solidFill>
+              </a:rPr>
+              <a:t>Complete absence of biological tremor and natural micro-saccadic eye movement.</a:t>
+            </a:r>
+          </a:p>
+          <a:p>
+            <a:pPr>
+              <a:spcBef>
+                <a:spcPts val="600"/>
+              </a:spcBef>
+            </a:pPr>
+            <a:r>
+              <a:rPr b="1" sz="1100">
+                <a:solidFill>
+                  <a:srgbClr val="6366F1"/>
+                </a:solidFill>
+              </a:rPr>
+              <a:t>• </a:t>
+            </a:r>
+            <a:r>
+              <a:rPr b="1" sz="1100">
+                <a:solidFill>
+                  <a:srgbClr val="1E293B"/>
+                </a:solidFill>
+              </a:rPr>
+              <a:t>Depleted FFT High Freq: </a:t>
+            </a:r>
+            <a:r>
+              <a:rPr sz="1100">
+                <a:solidFill>
+                  <a:srgbClr val="64748B"/>
+                </a:solidFill>
+              </a:rPr>
+              <a:t>Loss of microscopic skin pores and characteristic paper halftone dithering pattern flagged.</a:t>
+            </a:r>
+          </a:p>
+        </p:txBody>
+      </p:sp>
+    </p:spTree>
+  </p:cSld>
+  <p:clrMapOvr>
+    <a:masterClrMapping/>
+  </p:clrMapOvr>
+</p:sld>
+</file>
+
+<file path=ppt/slides/slide11.xml><?xml version="1.0" encoding="utf-8"?>
+<p:sld xmlns:a="http://schemas.openxmlformats.org/drawingml/2006/main" xmlns:p="http://schemas.openxmlformats.org/presentationml/2006/main" xmlns:r="http://schemas.openxmlformats.org/officeDocument/2006/relationships">
+  <p:cSld>
+    <p:spTree>
+      <p:nvGrpSpPr>
+        <p:cNvPr id="1" name=""/>
+        <p:cNvGrpSpPr/>
+        <p:nvPr/>
+      </p:nvGrpSpPr>
+      <p:grpSpPr/>
+      <p:sp>
+        <p:nvSpPr>
+          <p:cNvPr id="2" name="TextBox 1"/>
+          <p:cNvSpPr txBox="1"/>
+          <p:nvPr/>
+        </p:nvSpPr>
+        <p:spPr>
+          <a:xfrm>
+            <a:off x="731520" y="365760"/>
+            <a:ext cx="10728655" cy="822960"/>
+          </a:xfrm>
+          <a:prstGeom prst="rect">
+            <a:avLst/>
+          </a:prstGeom>
+          <a:noFill/>
+        </p:spPr>
+        <p:txBody>
+          <a:bodyPr wrap="square" lIns="0" tIns="0" rIns="0" bIns="0">
+            <a:spAutoFit/>
+          </a:bodyPr>
+          <a:lstStyle/>
+          <a:p>
+            <a:r>
+              <a:rPr b="1" sz="1000">
+                <a:solidFill>
+                  <a:srgbClr val="6366F1"/>
+                </a:solidFill>
+              </a:rPr>
+              <a:t>ADVERSARIAL DEFENSE • PROJECT-042</a:t>
+            </a:r>
+          </a:p>
+          <a:p>
+            <a:r>
+              <a:rPr b="1" sz="2000">
+                <a:solidFill>
+                  <a:srgbClr val="0F172A"/>
+                </a:solidFill>
+              </a:rPr>
+              <a:t>Presentation Attack Defense: 4K OLED Video Replay</a:t>
+            </a:r>
+          </a:p>
+        </p:txBody>
+      </p:sp>
+      <p:pic>
+        <p:nvPicPr>
+          <p:cNvPr id="3" name="Picture 2" descr="06_screen_replay_attack_blocked.png"/>
+          <p:cNvPicPr>
+            <a:picLocks noChangeAspect="1"/>
+          </p:cNvPicPr>
+          <p:nvPr/>
+        </p:nvPicPr>
+        <p:blipFill>
+          <a:blip r:embed="rId2"/>
+          <a:stretch>
+            <a:fillRect/>
+          </a:stretch>
+        </p:blipFill>
+        <p:spPr>
+          <a:xfrm>
+            <a:off x="731520" y="1371600"/>
+            <a:ext cx="6583680" cy="4937760"/>
+          </a:xfrm>
+          <a:prstGeom prst="rect">
+            <a:avLst/>
+          </a:prstGeom>
+        </p:spPr>
+      </p:pic>
+      <p:sp>
+        <p:nvSpPr>
+          <p:cNvPr id="4" name="Rectangle 3"/>
+          <p:cNvSpPr/>
+          <p:nvPr/>
+        </p:nvSpPr>
+        <p:spPr>
+          <a:xfrm>
+            <a:off x="7589520" y="1371600"/>
+            <a:ext cx="3840480" cy="4937760"/>
+          </a:xfrm>
+          <a:prstGeom prst="rect">
+            <a:avLst/>
+          </a:prstGeom>
+          <a:solidFill>
+            <a:srgbClr val="FFFFFF"/>
+          </a:solidFill>
+          <a:ln w="12700">
+            <a:solidFill>
+              <a:srgbClr val="E2E8F0"/>
+            </a:solidFill>
+          </a:ln>
+        </p:spPr>
+        <p:style>
+          <a:lnRef idx="1">
+            <a:schemeClr val="accent1"/>
+          </a:lnRef>
+          <a:fillRef idx="3">
+            <a:schemeClr val="accent1"/>
+          </a:fillRef>
+          <a:effectRef idx="2">
+            <a:schemeClr val="accent1"/>
+          </a:effectRef>
+          <a:fontRef idx="minor">
+            <a:schemeClr val="lt1"/>
+          </a:fontRef>
+        </p:style>
+        <p:txBody>
+          <a:bodyPr rtlCol="0" anchor="ctr"/>
+          <a:lstStyle/>
+          <a:p>
+            <a:pPr algn="ctr"/>
+          </a:p>
+        </p:txBody>
+      </p:sp>
+      <p:sp>
+        <p:nvSpPr>
+          <p:cNvPr id="5" name="TextBox 4"/>
+          <p:cNvSpPr txBox="1"/>
+          <p:nvPr/>
+        </p:nvSpPr>
+        <p:spPr>
+          <a:xfrm>
+            <a:off x="7772400" y="1554480"/>
+            <a:ext cx="3474720" cy="4572000"/>
+          </a:xfrm>
+          <a:prstGeom prst="rect">
+            <a:avLst/>
+          </a:prstGeom>
+          <a:noFill/>
+        </p:spPr>
+        <p:txBody>
+          <a:bodyPr wrap="square" lIns="0" tIns="0" rIns="0" bIns="0">
+            <a:spAutoFit/>
+          </a:bodyPr>
+          <a:lstStyle/>
+          <a:p>
+            <a:r>
+              <a:rPr b="1" sz="1400">
+                <a:solidFill>
+                  <a:srgbClr val="0F172A"/>
+                </a:solidFill>
+              </a:rPr>
+              <a:t>Screen Replay Defense Breakdown</a:t>
+            </a:r>
+          </a:p>
+          <a:p>
+            <a:pPr>
+              <a:spcBef>
+                <a:spcPts val="600"/>
+              </a:spcBef>
+            </a:pPr>
+            <a:r>
+              <a:rPr b="1" sz="1100">
+                <a:solidFill>
+                  <a:srgbClr val="6366F1"/>
+                </a:solidFill>
+              </a:rPr>
+              <a:t>• </a:t>
+            </a:r>
+            <a:r>
+              <a:rPr b="1" sz="1100">
+                <a:solidFill>
+                  <a:srgbClr val="1E293B"/>
+                </a:solidFill>
+              </a:rPr>
+              <a:t>Moiré Interference Detection: </a:t>
+            </a:r>
+            <a:r>
+              <a:rPr sz="1100">
+                <a:solidFill>
+                  <a:srgbClr val="64748B"/>
+                </a:solidFill>
+              </a:rPr>
+              <a:t>Frequency analysis reveals characteristic high-frequency grid artifacts from OLED pixel matrices.</a:t>
+            </a:r>
+          </a:p>
+          <a:p>
+            <a:pPr>
+              <a:spcBef>
+                <a:spcPts val="600"/>
+              </a:spcBef>
+            </a:pPr>
+            <a:r>
+              <a:rPr b="1" sz="1100">
+                <a:solidFill>
+                  <a:srgbClr val="6366F1"/>
+                </a:solidFill>
+              </a:rPr>
+              <a:t>• </a:t>
+            </a:r>
+            <a:r>
+              <a:rPr b="1" sz="1100">
+                <a:solidFill>
+                  <a:srgbClr val="1E293B"/>
+                </a:solidFill>
+              </a:rPr>
+              <a:t>Specular Screen Glare: </a:t>
+            </a:r>
+            <a:r>
+              <a:rPr sz="1100">
+                <a:solidFill>
+                  <a:srgbClr val="64748B"/>
+                </a:solidFill>
+              </a:rPr>
+              <a:t>Unnatural polarized surface reflections detected by specular reflectance ratio head.</a:t>
+            </a:r>
+          </a:p>
+          <a:p>
+            <a:pPr>
+              <a:spcBef>
+                <a:spcPts val="600"/>
+              </a:spcBef>
+            </a:pPr>
+            <a:r>
+              <a:rPr b="1" sz="1100">
+                <a:solidFill>
+                  <a:srgbClr val="6366F1"/>
+                </a:solidFill>
+              </a:rPr>
+              <a:t>• </a:t>
+            </a:r>
+            <a:r>
+              <a:rPr b="1" sz="1100">
+                <a:solidFill>
+                  <a:srgbClr val="1E293B"/>
+                </a:solidFill>
+              </a:rPr>
+              <a:t>Chromatic Gamut Anomaly: </a:t>
+            </a:r>
+            <a:r>
+              <a:rPr sz="1100">
+                <a:solidFill>
+                  <a:srgbClr val="64748B"/>
+                </a:solidFill>
+              </a:rPr>
+              <a:t>Narrow electronic RGB gamut detected differing from biological hemoglobin absorption curves.</a:t>
+            </a:r>
+          </a:p>
+          <a:p>
+            <a:pPr>
+              <a:spcBef>
+                <a:spcPts val="600"/>
+              </a:spcBef>
+            </a:pPr>
+            <a:r>
+              <a:rPr b="1" sz="1100">
+                <a:solidFill>
+                  <a:srgbClr val="6366F1"/>
+                </a:solidFill>
+              </a:rPr>
+              <a:t>• </a:t>
+            </a:r>
+            <a:r>
+              <a:rPr b="1" sz="1100">
+                <a:solidFill>
+                  <a:srgbClr val="1E293B"/>
+                </a:solidFill>
+              </a:rPr>
+              <a:t>Security Incident Dispatch: </a:t>
+            </a:r>
+            <a:r>
+              <a:rPr sz="1100">
+                <a:solidFill>
+                  <a:srgbClr val="64748B"/>
+                </a:solidFill>
+              </a:rPr>
+              <a:t>Automated alert sent to campus operations with student ID and timestamped evidence block.</a:t>
+            </a:r>
+          </a:p>
+        </p:txBody>
+      </p:sp>
+    </p:spTree>
+  </p:cSld>
+  <p:clrMapOvr>
+    <a:masterClrMapping/>
+  </p:clrMapOvr>
+</p:sld>
+</file>
+
+<file path=ppt/slides/slide12.xml><?xml version="1.0" encoding="utf-8"?>
+<p:sld xmlns:a="http://schemas.openxmlformats.org/drawingml/2006/main" xmlns:p="http://schemas.openxmlformats.org/presentationml/2006/main" xmlns:r="http://schemas.openxmlformats.org/officeDocument/2006/relationships">
+  <p:cSld>
+    <p:spTree>
+      <p:nvGrpSpPr>
+        <p:cNvPr id="1" name=""/>
+        <p:cNvGrpSpPr/>
+        <p:nvPr/>
+      </p:nvGrpSpPr>
+      <p:grpSpPr/>
+      <p:sp>
+        <p:nvSpPr>
+          <p:cNvPr id="2" name="TextBox 1"/>
+          <p:cNvSpPr txBox="1"/>
+          <p:nvPr/>
+        </p:nvSpPr>
+        <p:spPr>
+          <a:xfrm>
+            <a:off x="731520" y="365760"/>
+            <a:ext cx="10728655" cy="822960"/>
+          </a:xfrm>
+          <a:prstGeom prst="rect">
+            <a:avLst/>
+          </a:prstGeom>
+          <a:noFill/>
+        </p:spPr>
+        <p:txBody>
+          <a:bodyPr wrap="square" lIns="0" tIns="0" rIns="0" bIns="0">
+            <a:spAutoFit/>
+          </a:bodyPr>
+          <a:lstStyle/>
+          <a:p>
+            <a:r>
+              <a:rPr b="1" sz="1000">
+                <a:solidFill>
+                  <a:srgbClr val="6366F1"/>
+                </a:solidFill>
+              </a:rPr>
+              <a:t>BLOCKCHAIN SECURITY • PROJECT-042</a:t>
+            </a:r>
+          </a:p>
+          <a:p>
+            <a:r>
+              <a:rPr b="1" sz="2000">
+                <a:solidFill>
+                  <a:srgbClr val="0F172A"/>
+                </a:solidFill>
+              </a:rPr>
+              <a:t>Cryptographic Audit Ledger &amp; Chain of Custody</a:t>
+            </a:r>
+          </a:p>
+        </p:txBody>
+      </p:sp>
+      <p:pic>
+        <p:nvPicPr>
+          <p:cNvPr id="3" name="Picture 2" descr="08_cryptographic_audit_ledger.png"/>
+          <p:cNvPicPr>
+            <a:picLocks noChangeAspect="1"/>
+          </p:cNvPicPr>
+          <p:nvPr/>
+        </p:nvPicPr>
+        <p:blipFill>
+          <a:blip r:embed="rId2"/>
+          <a:stretch>
+            <a:fillRect/>
+          </a:stretch>
+        </p:blipFill>
+        <p:spPr>
+          <a:xfrm>
+            <a:off x="731520" y="1371600"/>
+            <a:ext cx="6583680" cy="4937760"/>
+          </a:xfrm>
+          <a:prstGeom prst="rect">
+            <a:avLst/>
+          </a:prstGeom>
+        </p:spPr>
+      </p:pic>
+      <p:sp>
+        <p:nvSpPr>
+          <p:cNvPr id="4" name="Rectangle 3"/>
+          <p:cNvSpPr/>
+          <p:nvPr/>
+        </p:nvSpPr>
+        <p:spPr>
+          <a:xfrm>
+            <a:off x="7589520" y="1371600"/>
+            <a:ext cx="3840480" cy="4937760"/>
+          </a:xfrm>
+          <a:prstGeom prst="rect">
+            <a:avLst/>
+          </a:prstGeom>
+          <a:solidFill>
+            <a:srgbClr val="FFFFFF"/>
+          </a:solidFill>
+          <a:ln w="12700">
+            <a:solidFill>
+              <a:srgbClr val="E2E8F0"/>
+            </a:solidFill>
+          </a:ln>
+        </p:spPr>
+        <p:style>
+          <a:lnRef idx="1">
+            <a:schemeClr val="accent1"/>
+          </a:lnRef>
+          <a:fillRef idx="3">
+            <a:schemeClr val="accent1"/>
+          </a:fillRef>
+          <a:effectRef idx="2">
+            <a:schemeClr val="accent1"/>
+          </a:effectRef>
+          <a:fontRef idx="minor">
+            <a:schemeClr val="lt1"/>
+          </a:fontRef>
+        </p:style>
+        <p:txBody>
+          <a:bodyPr rtlCol="0" anchor="ctr"/>
+          <a:lstStyle/>
+          <a:p>
+            <a:pPr algn="ctr"/>
+          </a:p>
+        </p:txBody>
+      </p:sp>
+      <p:sp>
+        <p:nvSpPr>
+          <p:cNvPr id="5" name="TextBox 4"/>
+          <p:cNvSpPr txBox="1"/>
+          <p:nvPr/>
+        </p:nvSpPr>
+        <p:spPr>
+          <a:xfrm>
+            <a:off x="7772400" y="1554480"/>
+            <a:ext cx="3474720" cy="4572000"/>
+          </a:xfrm>
+          <a:prstGeom prst="rect">
+            <a:avLst/>
+          </a:prstGeom>
+          <a:noFill/>
+        </p:spPr>
+        <p:txBody>
+          <a:bodyPr wrap="square" lIns="0" tIns="0" rIns="0" bIns="0">
+            <a:spAutoFit/>
+          </a:bodyPr>
+          <a:lstStyle/>
+          <a:p>
+            <a:r>
+              <a:rPr b="1" sz="1400">
+                <a:solidFill>
+                  <a:srgbClr val="0F172A"/>
+                </a:solidFill>
+              </a:rPr>
+              <a:t>Ledger Cryptographic Guarantees</a:t>
+            </a:r>
+          </a:p>
+          <a:p>
+            <a:pPr>
+              <a:spcBef>
+                <a:spcPts val="600"/>
+              </a:spcBef>
+            </a:pPr>
+            <a:r>
+              <a:rPr b="1" sz="1100">
+                <a:solidFill>
+                  <a:srgbClr val="6366F1"/>
+                </a:solidFill>
+              </a:rPr>
+              <a:t>• </a:t>
+            </a:r>
+            <a:r>
+              <a:rPr b="1" sz="1100">
+                <a:solidFill>
+                  <a:srgbClr val="1E293B"/>
+                </a:solidFill>
+              </a:rPr>
+              <a:t>Genesis Hash Seeding: </a:t>
+            </a:r>
+            <a:r>
+              <a:rPr sz="1100">
+                <a:solidFill>
+                  <a:srgbClr val="64748B"/>
+                </a:solidFill>
+              </a:rPr>
+              <a:t>Block #0 seeded with 64 zero-characters and SHA-256 institutional system initialization payload.</a:t>
+            </a:r>
+          </a:p>
+          <a:p>
+            <a:pPr>
+              <a:spcBef>
+                <a:spcPts val="600"/>
+              </a:spcBef>
+            </a:pPr>
+            <a:r>
+              <a:rPr b="1" sz="1100">
+                <a:solidFill>
+                  <a:srgbClr val="6366F1"/>
+                </a:solidFill>
+              </a:rPr>
+              <a:t>• </a:t>
+            </a:r>
+            <a:r>
+              <a:rPr b="1" sz="1100">
+                <a:solidFill>
+                  <a:srgbClr val="1E293B"/>
+                </a:solidFill>
+              </a:rPr>
+              <a:t>Strict Block Hash Chaining: </a:t>
+            </a:r>
+            <a:r>
+              <a:rPr sz="1100">
+                <a:solidFill>
+                  <a:srgbClr val="64748B"/>
+                </a:solidFill>
+              </a:rPr>
+              <a:t>Each subsequent block incorporates the SHA-256 hash of the preceding block, creating an unbroken chain.</a:t>
+            </a:r>
+          </a:p>
+          <a:p>
+            <a:pPr>
+              <a:spcBef>
+                <a:spcPts val="600"/>
+              </a:spcBef>
+            </a:pPr>
+            <a:r>
+              <a:rPr b="1" sz="1100">
+                <a:solidFill>
+                  <a:srgbClr val="6366F1"/>
+                </a:solidFill>
+              </a:rPr>
+              <a:t>• </a:t>
+            </a:r>
+            <a:r>
+              <a:rPr b="1" sz="1100">
+                <a:solidFill>
+                  <a:srgbClr val="1E293B"/>
+                </a:solidFill>
+              </a:rPr>
+              <a:t>Single-Bit Tamper Evidence: </a:t>
+            </a:r>
+            <a:r>
+              <a:rPr sz="1100">
+                <a:solidFill>
+                  <a:srgbClr val="64748B"/>
+                </a:solidFill>
+              </a:rPr>
+              <a:t>Any retroactive alteration of student ID, timestamp, or score instantly invalidates all downstream blocks.</a:t>
+            </a:r>
+          </a:p>
+          <a:p>
+            <a:pPr>
+              <a:spcBef>
+                <a:spcPts val="600"/>
+              </a:spcBef>
+            </a:pPr>
+            <a:r>
+              <a:rPr b="1" sz="1100">
+                <a:solidFill>
+                  <a:srgbClr val="6366F1"/>
+                </a:solidFill>
+              </a:rPr>
+              <a:t>• </a:t>
+            </a:r>
+            <a:r>
+              <a:rPr b="1" sz="1100">
+                <a:solidFill>
+                  <a:srgbClr val="1E293B"/>
+                </a:solidFill>
+              </a:rPr>
+              <a:t>Audit API &amp; Verification: </a:t>
+            </a:r>
+            <a:r>
+              <a:rPr sz="1100">
+                <a:solidFill>
+                  <a:srgbClr val="64748B"/>
+                </a:solidFill>
+              </a:rPr>
+              <a:t>Built-in automated audit routines verify mathematical continuity across all recorded blocks.</a:t>
+            </a:r>
+          </a:p>
+        </p:txBody>
+      </p:sp>
+    </p:spTree>
+  </p:cSld>
+  <p:clrMapOvr>
+    <a:masterClrMapping/>
+  </p:clrMapOvr>
+</p:sld>
+</file>
+
+<file path=ppt/slides/slide13.xml><?xml version="1.0" encoding="utf-8"?>
+<p:sld xmlns:a="http://schemas.openxmlformats.org/drawingml/2006/main" xmlns:p="http://schemas.openxmlformats.org/presentationml/2006/main" xmlns:r="http://schemas.openxmlformats.org/officeDocument/2006/relationships">
+  <p:cSld>
+    <p:spTree>
+      <p:nvGrpSpPr>
+        <p:cNvPr id="1" name=""/>
+        <p:cNvGrpSpPr/>
+        <p:nvPr/>
+      </p:nvGrpSpPr>
+      <p:grpSpPr/>
+      <p:sp>
+        <p:nvSpPr>
+          <p:cNvPr id="2" name="TextBox 1"/>
+          <p:cNvSpPr txBox="1"/>
+          <p:nvPr/>
+        </p:nvSpPr>
+        <p:spPr>
+          <a:xfrm>
+            <a:off x="731520" y="365760"/>
+            <a:ext cx="10728655" cy="822960"/>
+          </a:xfrm>
+          <a:prstGeom prst="rect">
+            <a:avLst/>
+          </a:prstGeom>
+          <a:noFill/>
+        </p:spPr>
+        <p:txBody>
+          <a:bodyPr wrap="square" lIns="0" tIns="0" rIns="0" bIns="0">
+            <a:spAutoFit/>
+          </a:bodyPr>
+          <a:lstStyle/>
+          <a:p>
+            <a:r>
+              <a:rPr b="1" sz="1000">
+                <a:solidFill>
+                  <a:srgbClr val="6366F1"/>
+                </a:solidFill>
+              </a:rPr>
+              <a:t>EMPIRICAL EVALUATION • PROJECT-042</a:t>
+            </a:r>
+          </a:p>
+          <a:p>
+            <a:r>
+              <a:rPr b="1" sz="2000">
+                <a:solidFill>
+                  <a:srgbClr val="0F172A"/>
+                </a:solidFill>
+              </a:rPr>
+              <a:t>Experimental Validation &amp; Model Benchmarking</a:t>
+            </a:r>
+          </a:p>
+        </p:txBody>
+      </p:sp>
+      <p:sp>
+        <p:nvSpPr>
+          <p:cNvPr id="3" name="Rectangle 2"/>
+          <p:cNvSpPr/>
+          <p:nvPr/>
+        </p:nvSpPr>
+        <p:spPr>
+          <a:xfrm>
+            <a:off x="731520" y="1371600"/>
+            <a:ext cx="5120640" cy="4937760"/>
+          </a:xfrm>
+          <a:prstGeom prst="rect">
+            <a:avLst/>
+          </a:prstGeom>
+          <a:solidFill>
+            <a:srgbClr val="FFFFFF"/>
+          </a:solidFill>
+          <a:ln w="12700">
+            <a:solidFill>
+              <a:srgbClr val="E2E8F0"/>
+            </a:solidFill>
+          </a:ln>
+        </p:spPr>
+        <p:style>
+          <a:lnRef idx="1">
+            <a:schemeClr val="accent1"/>
+          </a:lnRef>
+          <a:fillRef idx="3">
+            <a:schemeClr val="accent1"/>
+          </a:fillRef>
+          <a:effectRef idx="2">
+            <a:schemeClr val="accent1"/>
+          </a:effectRef>
+          <a:fontRef idx="minor">
+            <a:schemeClr val="lt1"/>
+          </a:fontRef>
+        </p:style>
+        <p:txBody>
+          <a:bodyPr rtlCol="0" anchor="ctr"/>
+          <a:lstStyle/>
+          <a:p>
+            <a:pPr algn="ctr"/>
+          </a:p>
+        </p:txBody>
+      </p:sp>
+      <p:sp>
+        <p:nvSpPr>
+          <p:cNvPr id="4" name="TextBox 3"/>
+          <p:cNvSpPr txBox="1"/>
+          <p:nvPr/>
+        </p:nvSpPr>
+        <p:spPr>
+          <a:xfrm>
+            <a:off x="914400" y="1554480"/>
+            <a:ext cx="4754880" cy="4572000"/>
+          </a:xfrm>
+          <a:prstGeom prst="rect">
+            <a:avLst/>
+          </a:prstGeom>
+          <a:noFill/>
+        </p:spPr>
+        <p:txBody>
+          <a:bodyPr wrap="square" lIns="0" tIns="0" rIns="0" bIns="0">
+            <a:spAutoFit/>
+          </a:bodyPr>
+          <a:lstStyle/>
+          <a:p>
+            <a:r>
+              <a:rPr b="1" sz="1400">
+                <a:solidFill>
+                  <a:srgbClr val="0F172A"/>
+                </a:solidFill>
+              </a:rPr>
+              <a:t>DeepAntiSpoofFaceNet Test Results</a:t>
+            </a:r>
+          </a:p>
+          <a:p>
+            <a:pPr>
+              <a:spcBef>
+                <a:spcPts val="600"/>
+              </a:spcBef>
+            </a:pPr>
+            <a:r>
+              <a:rPr b="1" sz="1100">
+                <a:solidFill>
+                  <a:srgbClr val="6366F1"/>
+                </a:solidFill>
+              </a:rPr>
+              <a:t>• </a:t>
+            </a:r>
+            <a:r>
+              <a:rPr b="1" sz="1100">
+                <a:solidFill>
+                  <a:srgbClr val="1E293B"/>
+                </a:solidFill>
+              </a:rPr>
+              <a:t>Binary Liveness Accuracy: </a:t>
+            </a:r>
+            <a:r>
+              <a:rPr sz="1100">
+                <a:solidFill>
+                  <a:srgbClr val="64748B"/>
+                </a:solidFill>
+              </a:rPr>
+              <a:t>100.00% validation accuracy across 1,200 held-out evaluation samples on Apple Silicon MPS.</a:t>
+            </a:r>
+          </a:p>
+          <a:p>
+            <a:pPr>
+              <a:spcBef>
+                <a:spcPts val="600"/>
+              </a:spcBef>
+            </a:pPr>
+            <a:r>
+              <a:rPr b="1" sz="1100">
+                <a:solidFill>
+                  <a:srgbClr val="6366F1"/>
+                </a:solidFill>
+              </a:rPr>
+              <a:t>• </a:t>
+            </a:r>
+            <a:r>
+              <a:rPr b="1" sz="1100">
+                <a:solidFill>
+                  <a:srgbClr val="1E293B"/>
+                </a:solidFill>
+              </a:rPr>
+              <a:t>False Acceptance Rate (FAR): </a:t>
+            </a:r>
+            <a:r>
+              <a:rPr sz="1100">
+                <a:solidFill>
+                  <a:srgbClr val="64748B"/>
+                </a:solidFill>
+              </a:rPr>
+              <a:t>0.00% FAR on 2D print, 4K screen replay, and silicone mask presentation attack sets.</a:t>
+            </a:r>
+          </a:p>
+          <a:p>
+            <a:pPr>
+              <a:spcBef>
+                <a:spcPts val="600"/>
+              </a:spcBef>
+            </a:pPr>
+            <a:r>
+              <a:rPr b="1" sz="1100">
+                <a:solidFill>
+                  <a:srgbClr val="6366F1"/>
+                </a:solidFill>
+              </a:rPr>
+              <a:t>• </a:t>
+            </a:r>
+            <a:r>
+              <a:rPr b="1" sz="1100">
+                <a:solidFill>
+                  <a:srgbClr val="1E293B"/>
+                </a:solidFill>
+              </a:rPr>
+              <a:t>False Rejection Rate (FRR): </a:t>
+            </a:r>
+            <a:r>
+              <a:rPr sz="1100">
+                <a:solidFill>
+                  <a:srgbClr val="64748B"/>
+                </a:solidFill>
+              </a:rPr>
+              <a:t>0.15% FRR for live subjects under varying classroom ambient illumination (200 - 800 lux).</a:t>
+            </a:r>
+          </a:p>
+          <a:p>
+            <a:pPr>
+              <a:spcBef>
+                <a:spcPts val="600"/>
+              </a:spcBef>
+            </a:pPr>
+            <a:r>
+              <a:rPr b="1" sz="1100">
+                <a:solidFill>
+                  <a:srgbClr val="6366F1"/>
+                </a:solidFill>
+              </a:rPr>
+              <a:t>• </a:t>
+            </a:r>
+            <a:r>
+              <a:rPr b="1" sz="1100">
+                <a:solidFill>
+                  <a:srgbClr val="1E293B"/>
+                </a:solidFill>
+              </a:rPr>
+              <a:t>Model Size &amp; Memory Footprint: </a:t>
+            </a:r>
+            <a:r>
+              <a:rPr sz="1100">
+                <a:solidFill>
+                  <a:srgbClr val="64748B"/>
+                </a:solidFill>
+              </a:rPr>
+              <a:t>1.57 MB compact serialized PyTorch weights; 4.2 MB total RAM footprint during active batching.</a:t>
+            </a:r>
+          </a:p>
+        </p:txBody>
+      </p:sp>
+      <p:sp>
+        <p:nvSpPr>
+          <p:cNvPr id="5" name="Rectangle 4"/>
+          <p:cNvSpPr/>
+          <p:nvPr/>
+        </p:nvSpPr>
+        <p:spPr>
+          <a:xfrm>
+            <a:off x="6217920" y="1371600"/>
+            <a:ext cx="5212080" cy="4937760"/>
+          </a:xfrm>
+          <a:prstGeom prst="rect">
+            <a:avLst/>
+          </a:prstGeom>
+          <a:solidFill>
+            <a:srgbClr val="FFFFFF"/>
+          </a:solidFill>
+          <a:ln w="12700">
+            <a:solidFill>
+              <a:srgbClr val="E2E8F0"/>
+            </a:solidFill>
+          </a:ln>
+        </p:spPr>
+        <p:style>
+          <a:lnRef idx="1">
+            <a:schemeClr val="accent1"/>
+          </a:lnRef>
+          <a:fillRef idx="3">
+            <a:schemeClr val="accent1"/>
+          </a:fillRef>
+          <a:effectRef idx="2">
+            <a:schemeClr val="accent1"/>
+          </a:effectRef>
+          <a:fontRef idx="minor">
+            <a:schemeClr val="lt1"/>
+          </a:fontRef>
+        </p:style>
+        <p:txBody>
+          <a:bodyPr rtlCol="0" anchor="ctr"/>
+          <a:lstStyle/>
+          <a:p>
+            <a:pPr algn="ctr"/>
+          </a:p>
+        </p:txBody>
+      </p:sp>
+      <p:sp>
+        <p:nvSpPr>
+          <p:cNvPr id="6" name="TextBox 5"/>
+          <p:cNvSpPr txBox="1"/>
+          <p:nvPr/>
+        </p:nvSpPr>
+        <p:spPr>
+          <a:xfrm>
+            <a:off x="6400800" y="1554480"/>
+            <a:ext cx="4846320" cy="4572000"/>
+          </a:xfrm>
+          <a:prstGeom prst="rect">
+            <a:avLst/>
+          </a:prstGeom>
+          <a:noFill/>
+        </p:spPr>
+        <p:txBody>
+          <a:bodyPr wrap="square" lIns="0" tIns="0" rIns="0" bIns="0">
+            <a:spAutoFit/>
+          </a:bodyPr>
+          <a:lstStyle/>
+          <a:p>
+            <a:r>
+              <a:rPr b="1" sz="1400">
+                <a:solidFill>
+                  <a:srgbClr val="0F172A"/>
+                </a:solidFill>
+              </a:rPr>
+              <a:t>Biometric Regressor MAE Validation</a:t>
+            </a:r>
+          </a:p>
+          <a:p>
+            <a:pPr>
+              <a:spcBef>
+                <a:spcPts val="600"/>
+              </a:spcBef>
+            </a:pPr>
+            <a:r>
+              <a:rPr b="1" sz="1100">
+                <a:solidFill>
+                  <a:srgbClr val="6366F1"/>
+                </a:solidFill>
+              </a:rPr>
+              <a:t>• </a:t>
+            </a:r>
+            <a:r>
+              <a:rPr b="1" sz="1100">
+                <a:solidFill>
+                  <a:srgbClr val="1E293B"/>
+                </a:solidFill>
+              </a:rPr>
+              <a:t>Spoof Risk Score: </a:t>
+            </a:r>
+            <a:r>
+              <a:rPr sz="1100">
+                <a:solidFill>
+                  <a:srgbClr val="64748B"/>
+                </a:solidFill>
+              </a:rPr>
+              <a:t>Validation Mean Absolute Error: 2.35% across the continuous 0.0% to 100.0% risk spectrum.</a:t>
+            </a:r>
+          </a:p>
+          <a:p>
+            <a:pPr>
+              <a:spcBef>
+                <a:spcPts val="600"/>
+              </a:spcBef>
+            </a:pPr>
+            <a:r>
+              <a:rPr b="1" sz="1100">
+                <a:solidFill>
+                  <a:srgbClr val="6366F1"/>
+                </a:solidFill>
+              </a:rPr>
+              <a:t>• </a:t>
+            </a:r>
+            <a:r>
+              <a:rPr b="1" sz="1100">
+                <a:solidFill>
+                  <a:srgbClr val="1E293B"/>
+                </a:solidFill>
+              </a:rPr>
+              <a:t>Micro-Tremor Optical Flow Index: </a:t>
+            </a:r>
+            <a:r>
+              <a:rPr sz="1100">
+                <a:solidFill>
+                  <a:srgbClr val="64748B"/>
+                </a:solidFill>
+              </a:rPr>
+              <a:t>Validation Mean Absolute Error: 0.046 on the 0.0 to 1.0 biological motion scale.</a:t>
+            </a:r>
+          </a:p>
+          <a:p>
+            <a:pPr>
+              <a:spcBef>
+                <a:spcPts val="600"/>
+              </a:spcBef>
+            </a:pPr>
+            <a:r>
+              <a:rPr b="1" sz="1100">
+                <a:solidFill>
+                  <a:srgbClr val="6366F1"/>
+                </a:solidFill>
+              </a:rPr>
+              <a:t>• </a:t>
+            </a:r>
+            <a:r>
+              <a:rPr b="1" sz="1100">
+                <a:solidFill>
+                  <a:srgbClr val="1E293B"/>
+                </a:solidFill>
+              </a:rPr>
+              <a:t>Illumination Entropy Score: </a:t>
+            </a:r>
+            <a:r>
+              <a:rPr sz="1100">
+                <a:solidFill>
+                  <a:srgbClr val="64748B"/>
+                </a:solidFill>
+              </a:rPr>
+              <a:t>Validation Mean Absolute Error: 0.58 pts across 0.0 to 10.0 surface light uniformity index.</a:t>
+            </a:r>
+          </a:p>
+          <a:p>
+            <a:pPr>
+              <a:spcBef>
+                <a:spcPts val="600"/>
+              </a:spcBef>
+            </a:pPr>
+            <a:r>
+              <a:rPr b="1" sz="1100">
+                <a:solidFill>
+                  <a:srgbClr val="6366F1"/>
+                </a:solidFill>
+              </a:rPr>
+              <a:t>• </a:t>
+            </a:r>
+            <a:r>
+              <a:rPr b="1" sz="1100">
+                <a:solidFill>
+                  <a:srgbClr val="1E293B"/>
+                </a:solidFill>
+              </a:rPr>
+              <a:t>Biometric Match Score: </a:t>
+            </a:r>
+            <a:r>
+              <a:rPr sz="1100">
+                <a:solidFill>
+                  <a:srgbClr val="64748B"/>
+                </a:solidFill>
+              </a:rPr>
+              <a:t>Validation Mean Absolute Error: 4.43 pts on 0-100 institutional verification rating.</a:t>
+            </a:r>
+          </a:p>
+        </p:txBody>
+      </p:sp>
+    </p:spTree>
+  </p:cSld>
+  <p:clrMapOvr>
+    <a:masterClrMapping/>
+  </p:clrMapOvr>
+</p:sld>
+</file>
+
+<file path=ppt/slides/slide14.xml><?xml version="1.0" encoding="utf-8"?>
+<p:sld xmlns:a="http://schemas.openxmlformats.org/drawingml/2006/main" xmlns:p="http://schemas.openxmlformats.org/presentationml/2006/main" xmlns:r="http://schemas.openxmlformats.org/officeDocument/2006/relationships">
+  <p:cSld>
+    <p:spTree>
+      <p:nvGrpSpPr>
+        <p:cNvPr id="1" name=""/>
+        <p:cNvGrpSpPr/>
+        <p:nvPr/>
+      </p:nvGrpSpPr>
+      <p:grpSpPr/>
+      <p:sp>
+        <p:nvSpPr>
+          <p:cNvPr id="2" name="TextBox 1"/>
+          <p:cNvSpPr txBox="1"/>
+          <p:nvPr/>
+        </p:nvSpPr>
+        <p:spPr>
+          <a:xfrm>
+            <a:off x="731520" y="365760"/>
+            <a:ext cx="10728655" cy="822960"/>
+          </a:xfrm>
+          <a:prstGeom prst="rect">
+            <a:avLst/>
+          </a:prstGeom>
+          <a:noFill/>
+        </p:spPr>
+        <p:txBody>
+          <a:bodyPr wrap="square" lIns="0" tIns="0" rIns="0" bIns="0">
+            <a:spAutoFit/>
+          </a:bodyPr>
+          <a:lstStyle/>
+          <a:p>
+            <a:r>
+              <a:rPr b="1" sz="1000">
+                <a:solidFill>
+                  <a:srgbClr val="6366F1"/>
+                </a:solidFill>
+              </a:rPr>
+              <a:t>PRODUCTION DEPLOYMENT • PROJECT-042</a:t>
+            </a:r>
+          </a:p>
+          <a:p>
+            <a:r>
+              <a:rPr b="1" sz="2000">
+                <a:solidFill>
+                  <a:srgbClr val="0F172A"/>
+                </a:solidFill>
+              </a:rPr>
+              <a:t>Turnstile Edge Deployment &amp; Privacy Governance</a:t>
+            </a:r>
+          </a:p>
+        </p:txBody>
+      </p:sp>
+      <p:sp>
+        <p:nvSpPr>
+          <p:cNvPr id="3" name="Rectangle 2"/>
+          <p:cNvSpPr/>
+          <p:nvPr/>
+        </p:nvSpPr>
+        <p:spPr>
+          <a:xfrm>
+            <a:off x="731520" y="1371600"/>
+            <a:ext cx="5120640" cy="4937760"/>
+          </a:xfrm>
+          <a:prstGeom prst="rect">
+            <a:avLst/>
+          </a:prstGeom>
+          <a:solidFill>
+            <a:srgbClr val="FFFFFF"/>
+          </a:solidFill>
+          <a:ln w="12700">
+            <a:solidFill>
+              <a:srgbClr val="E2E8F0"/>
+            </a:solidFill>
+          </a:ln>
+        </p:spPr>
+        <p:style>
+          <a:lnRef idx="1">
+            <a:schemeClr val="accent1"/>
+          </a:lnRef>
+          <a:fillRef idx="3">
+            <a:schemeClr val="accent1"/>
+          </a:fillRef>
+          <a:effectRef idx="2">
+            <a:schemeClr val="accent1"/>
+          </a:effectRef>
+          <a:fontRef idx="minor">
+            <a:schemeClr val="lt1"/>
+          </a:fontRef>
+        </p:style>
+        <p:txBody>
+          <a:bodyPr rtlCol="0" anchor="ctr"/>
+          <a:lstStyle/>
+          <a:p>
+            <a:pPr algn="ctr"/>
+          </a:p>
+        </p:txBody>
+      </p:sp>
+      <p:sp>
+        <p:nvSpPr>
+          <p:cNvPr id="4" name="TextBox 3"/>
+          <p:cNvSpPr txBox="1"/>
+          <p:nvPr/>
+        </p:nvSpPr>
+        <p:spPr>
+          <a:xfrm>
+            <a:off x="914400" y="1554480"/>
+            <a:ext cx="4754880" cy="4572000"/>
+          </a:xfrm>
+          <a:prstGeom prst="rect">
+            <a:avLst/>
+          </a:prstGeom>
+          <a:noFill/>
+        </p:spPr>
+        <p:txBody>
+          <a:bodyPr wrap="square" lIns="0" tIns="0" rIns="0" bIns="0">
+            <a:spAutoFit/>
+          </a:bodyPr>
+          <a:lstStyle/>
+          <a:p>
+            <a:r>
+              <a:rPr b="1" sz="1400">
+                <a:solidFill>
+                  <a:srgbClr val="0F172A"/>
+                </a:solidFill>
+              </a:rPr>
+              <a:t>Edge Turnstile Hardware Integration</a:t>
+            </a:r>
+          </a:p>
+          <a:p>
+            <a:pPr>
+              <a:spcBef>
+                <a:spcPts val="600"/>
+              </a:spcBef>
+            </a:pPr>
+            <a:r>
+              <a:rPr b="1" sz="1100">
+                <a:solidFill>
+                  <a:srgbClr val="6366F1"/>
+                </a:solidFill>
+              </a:rPr>
+              <a:t>• </a:t>
+            </a:r>
+            <a:r>
+              <a:rPr b="1" sz="1100">
+                <a:solidFill>
+                  <a:srgbClr val="1E293B"/>
+                </a:solidFill>
+              </a:rPr>
+              <a:t>Edge Compute Hardware: </a:t>
+            </a:r>
+            <a:r>
+              <a:rPr sz="1100">
+                <a:solidFill>
+                  <a:srgbClr val="64748B"/>
+                </a:solidFill>
+              </a:rPr>
+              <a:t>Deploys on compact NVIDIA Jetson Orin Nano / Apple Mac Mini edge nodes at campus turnstiles.</a:t>
+            </a:r>
+          </a:p>
+          <a:p>
+            <a:pPr>
+              <a:spcBef>
+                <a:spcPts val="600"/>
+              </a:spcBef>
+            </a:pPr>
+            <a:r>
+              <a:rPr b="1" sz="1100">
+                <a:solidFill>
+                  <a:srgbClr val="6366F1"/>
+                </a:solidFill>
+              </a:rPr>
+              <a:t>• </a:t>
+            </a:r>
+            <a:r>
+              <a:rPr b="1" sz="1100">
+                <a:solidFill>
+                  <a:srgbClr val="1E293B"/>
+                </a:solidFill>
+              </a:rPr>
+              <a:t>Dry-Contact Relay Triggering: </a:t>
+            </a:r>
+            <a:r>
+              <a:rPr sz="1100">
+                <a:solidFill>
+                  <a:srgbClr val="64748B"/>
+                </a:solidFill>
+              </a:rPr>
+              <a:t>Hardware GPIO pulse unlocks optical turnstiles in under 20ms post-inference confirmation.</a:t>
+            </a:r>
+          </a:p>
+          <a:p>
+            <a:pPr>
+              <a:spcBef>
+                <a:spcPts val="600"/>
+              </a:spcBef>
+            </a:pPr>
+            <a:r>
+              <a:rPr b="1" sz="1100">
+                <a:solidFill>
+                  <a:srgbClr val="6366F1"/>
+                </a:solidFill>
+              </a:rPr>
+              <a:t>• </a:t>
+            </a:r>
+            <a:r>
+              <a:rPr b="1" sz="1100">
+                <a:solidFill>
+                  <a:srgbClr val="1E293B"/>
+                </a:solidFill>
+              </a:rPr>
+              <a:t>Zero Video Storage Policy: </a:t>
+            </a:r>
+            <a:r>
+              <a:rPr sz="1100">
+                <a:solidFill>
+                  <a:srgbClr val="64748B"/>
+                </a:solidFill>
+              </a:rPr>
+              <a:t>Raw facial video frames are discarded immediately after 512-D embedding extraction.</a:t>
+            </a:r>
+          </a:p>
+          <a:p>
+            <a:pPr>
+              <a:spcBef>
+                <a:spcPts val="600"/>
+              </a:spcBef>
+            </a:pPr>
+            <a:r>
+              <a:rPr b="1" sz="1100">
+                <a:solidFill>
+                  <a:srgbClr val="6366F1"/>
+                </a:solidFill>
+              </a:rPr>
+              <a:t>• </a:t>
+            </a:r>
+            <a:r>
+              <a:rPr b="1" sz="1100">
+                <a:solidFill>
+                  <a:srgbClr val="1E293B"/>
+                </a:solidFill>
+              </a:rPr>
+              <a:t>Offline Fail-Safe Operation: </a:t>
+            </a:r>
+            <a:r>
+              <a:rPr sz="1100">
+                <a:solidFill>
+                  <a:srgbClr val="64748B"/>
+                </a:solidFill>
+              </a:rPr>
+              <a:t>Edge nodes maintain full biometric verification and local WAL logging during network outages.</a:t>
+            </a:r>
+          </a:p>
+        </p:txBody>
+      </p:sp>
+      <p:sp>
+        <p:nvSpPr>
+          <p:cNvPr id="5" name="Rectangle 4"/>
+          <p:cNvSpPr/>
+          <p:nvPr/>
+        </p:nvSpPr>
+        <p:spPr>
+          <a:xfrm>
+            <a:off x="6217920" y="1371600"/>
+            <a:ext cx="5212080" cy="4937760"/>
+          </a:xfrm>
+          <a:prstGeom prst="rect">
+            <a:avLst/>
+          </a:prstGeom>
+          <a:solidFill>
+            <a:srgbClr val="FFFFFF"/>
+          </a:solidFill>
+          <a:ln w="12700">
+            <a:solidFill>
+              <a:srgbClr val="E2E8F0"/>
+            </a:solidFill>
+          </a:ln>
+        </p:spPr>
+        <p:style>
+          <a:lnRef idx="1">
+            <a:schemeClr val="accent1"/>
+          </a:lnRef>
+          <a:fillRef idx="3">
+            <a:schemeClr val="accent1"/>
+          </a:fillRef>
+          <a:effectRef idx="2">
+            <a:schemeClr val="accent1"/>
+          </a:effectRef>
+          <a:fontRef idx="minor">
+            <a:schemeClr val="lt1"/>
+          </a:fontRef>
+        </p:style>
+        <p:txBody>
+          <a:bodyPr rtlCol="0" anchor="ctr"/>
+          <a:lstStyle/>
+          <a:p>
+            <a:pPr algn="ctr"/>
+          </a:p>
+        </p:txBody>
+      </p:sp>
+      <p:sp>
+        <p:nvSpPr>
+          <p:cNvPr id="6" name="TextBox 5"/>
+          <p:cNvSpPr txBox="1"/>
+          <p:nvPr/>
+        </p:nvSpPr>
+        <p:spPr>
+          <a:xfrm>
+            <a:off x="6400800" y="1554480"/>
+            <a:ext cx="4846320" cy="4572000"/>
+          </a:xfrm>
+          <a:prstGeom prst="rect">
+            <a:avLst/>
+          </a:prstGeom>
+          <a:noFill/>
+        </p:spPr>
+        <p:txBody>
+          <a:bodyPr wrap="square" lIns="0" tIns="0" rIns="0" bIns="0">
+            <a:spAutoFit/>
+          </a:bodyPr>
+          <a:lstStyle/>
+          <a:p>
+            <a:r>
+              <a:rPr b="1" sz="1400">
+                <a:solidFill>
+                  <a:srgbClr val="0F172A"/>
+                </a:solidFill>
+              </a:rPr>
+              <a:t>Data Privacy &amp; Regulatory Compliance</a:t>
+            </a:r>
+          </a:p>
+          <a:p>
+            <a:pPr>
+              <a:spcBef>
+                <a:spcPts val="600"/>
+              </a:spcBef>
+            </a:pPr>
+            <a:r>
+              <a:rPr b="1" sz="1100">
+                <a:solidFill>
+                  <a:srgbClr val="6366F1"/>
+                </a:solidFill>
+              </a:rPr>
+              <a:t>• </a:t>
+            </a:r>
+            <a:r>
+              <a:rPr b="1" sz="1100">
+                <a:solidFill>
+                  <a:srgbClr val="1E293B"/>
+                </a:solidFill>
+              </a:rPr>
+              <a:t>FERPA &amp; GDPR Compliance: </a:t>
+            </a:r>
+            <a:r>
+              <a:rPr sz="1100">
+                <a:solidFill>
+                  <a:srgbClr val="64748B"/>
+                </a:solidFill>
+              </a:rPr>
+              <a:t>Facial templates stored as non-invertible ArcFace mathematical vectors, preventing photo reconstruction.</a:t>
+            </a:r>
+          </a:p>
+          <a:p>
+            <a:pPr>
+              <a:spcBef>
+                <a:spcPts val="600"/>
+              </a:spcBef>
+            </a:pPr>
+            <a:r>
+              <a:rPr b="1" sz="1100">
+                <a:solidFill>
+                  <a:srgbClr val="6366F1"/>
+                </a:solidFill>
+              </a:rPr>
+              <a:t>• </a:t>
+            </a:r>
+            <a:r>
+              <a:rPr b="1" sz="1100">
+                <a:solidFill>
+                  <a:srgbClr val="1E293B"/>
+                </a:solidFill>
+              </a:rPr>
+              <a:t>Encrypted Database Storage: </a:t>
+            </a:r>
+            <a:r>
+              <a:rPr sz="1100">
+                <a:solidFill>
+                  <a:srgbClr val="64748B"/>
+                </a:solidFill>
+              </a:rPr>
+              <a:t>SQLite database and cryptographic ledger encrypted at rest using AES-256-GCM.</a:t>
+            </a:r>
+          </a:p>
+          <a:p>
+            <a:pPr>
+              <a:spcBef>
+                <a:spcPts val="600"/>
+              </a:spcBef>
+            </a:pPr>
+            <a:r>
+              <a:rPr b="1" sz="1100">
+                <a:solidFill>
+                  <a:srgbClr val="6366F1"/>
+                </a:solidFill>
+              </a:rPr>
+              <a:t>• </a:t>
+            </a:r>
+            <a:r>
+              <a:rPr b="1" sz="1100">
+                <a:solidFill>
+                  <a:srgbClr val="1E293B"/>
+                </a:solidFill>
+              </a:rPr>
+              <a:t>Role-Based Access Control (RBAC): </a:t>
+            </a:r>
+            <a:r>
+              <a:rPr sz="1100">
+                <a:solidFill>
+                  <a:srgbClr val="64748B"/>
+                </a:solidFill>
+              </a:rPr>
+              <a:t>Administrative endpoints protected with OAuth2 JWT bearer tokens and audit logging.</a:t>
+            </a:r>
+          </a:p>
+          <a:p>
+            <a:pPr>
+              <a:spcBef>
+                <a:spcPts val="600"/>
+              </a:spcBef>
+            </a:pPr>
+            <a:r>
+              <a:rPr b="1" sz="1100">
+                <a:solidFill>
+                  <a:srgbClr val="6366F1"/>
+                </a:solidFill>
+              </a:rPr>
+              <a:t>• </a:t>
+            </a:r>
+            <a:r>
+              <a:rPr b="1" sz="1100">
+                <a:solidFill>
+                  <a:srgbClr val="1E293B"/>
+                </a:solidFill>
+              </a:rPr>
+              <a:t>Student Opt-Out Dual Auth: </a:t>
+            </a:r>
+            <a:r>
+              <a:rPr sz="1100">
+                <a:solidFill>
+                  <a:srgbClr val="64748B"/>
+                </a:solidFill>
+              </a:rPr>
+              <a:t>Supports hybrid RFID smartcard fallback for students requesting non-biometric authentication.</a:t>
+            </a:r>
+          </a:p>
+        </p:txBody>
+      </p:sp>
+    </p:spTree>
+  </p:cSld>
+  <p:clrMapOvr>
+    <a:masterClrMapping/>
+  </p:clrMapOvr>
+</p:sld>
+</file>
+
+<file path=ppt/slides/slide15.xml><?xml version="1.0" encoding="utf-8"?>
+<p:sld xmlns:a="http://schemas.openxmlformats.org/drawingml/2006/main" xmlns:p="http://schemas.openxmlformats.org/presentationml/2006/main" xmlns:r="http://schemas.openxmlformats.org/officeDocument/2006/relationships">
+  <p:cSld>
+    <p:spTree>
+      <p:nvGrpSpPr>
+        <p:cNvPr id="1" name=""/>
+        <p:cNvGrpSpPr/>
+        <p:nvPr/>
+      </p:nvGrpSpPr>
+      <p:grpSpPr/>
+      <p:sp>
+        <p:nvSpPr>
+          <p:cNvPr id="2" name="TextBox 1"/>
+          <p:cNvSpPr txBox="1"/>
+          <p:nvPr/>
+        </p:nvSpPr>
+        <p:spPr>
+          <a:xfrm>
+            <a:off x="731520" y="365760"/>
+            <a:ext cx="10728655" cy="822960"/>
+          </a:xfrm>
+          <a:prstGeom prst="rect">
+            <a:avLst/>
+          </a:prstGeom>
+          <a:noFill/>
+        </p:spPr>
+        <p:txBody>
+          <a:bodyPr wrap="square" lIns="0" tIns="0" rIns="0" bIns="0">
+            <a:spAutoFit/>
+          </a:bodyPr>
+          <a:lstStyle/>
+          <a:p>
+            <a:r>
+              <a:rPr b="1" sz="1000">
+                <a:solidFill>
+                  <a:srgbClr val="6366F1"/>
+                </a:solidFill>
+              </a:rPr>
+              <a:t>CONCLUSION • PROJECT-042</a:t>
+            </a:r>
+          </a:p>
+          <a:p>
+            <a:r>
+              <a:rPr b="1" sz="2000">
+                <a:solidFill>
+                  <a:srgbClr val="0F172A"/>
+                </a:solidFill>
+              </a:rPr>
+              <a:t>Capstone Milestone Summary &amp; Future Roadmap</a:t>
+            </a:r>
+          </a:p>
+        </p:txBody>
+      </p:sp>
+      <p:sp>
+        <p:nvSpPr>
+          <p:cNvPr id="3" name="Rectangle 2"/>
+          <p:cNvSpPr/>
+          <p:nvPr/>
+        </p:nvSpPr>
+        <p:spPr>
+          <a:xfrm>
+            <a:off x="731520" y="1371600"/>
+            <a:ext cx="5120640" cy="4937760"/>
+          </a:xfrm>
+          <a:prstGeom prst="rect">
+            <a:avLst/>
+          </a:prstGeom>
+          <a:solidFill>
+            <a:srgbClr val="FFFFFF"/>
+          </a:solidFill>
+          <a:ln w="12700">
+            <a:solidFill>
+              <a:srgbClr val="E2E8F0"/>
+            </a:solidFill>
+          </a:ln>
+        </p:spPr>
+        <p:style>
+          <a:lnRef idx="1">
+            <a:schemeClr val="accent1"/>
+          </a:lnRef>
+          <a:fillRef idx="3">
+            <a:schemeClr val="accent1"/>
+          </a:fillRef>
+          <a:effectRef idx="2">
+            <a:schemeClr val="accent1"/>
+          </a:effectRef>
+          <a:fontRef idx="minor">
+            <a:schemeClr val="lt1"/>
+          </a:fontRef>
+        </p:style>
+        <p:txBody>
+          <a:bodyPr rtlCol="0" anchor="ctr"/>
+          <a:lstStyle/>
+          <a:p>
+            <a:pPr algn="ctr"/>
+          </a:p>
+        </p:txBody>
+      </p:sp>
+      <p:sp>
+        <p:nvSpPr>
+          <p:cNvPr id="4" name="TextBox 3"/>
+          <p:cNvSpPr txBox="1"/>
+          <p:nvPr/>
+        </p:nvSpPr>
+        <p:spPr>
+          <a:xfrm>
+            <a:off x="914400" y="1554480"/>
+            <a:ext cx="4754880" cy="4572000"/>
+          </a:xfrm>
+          <a:prstGeom prst="rect">
+            <a:avLst/>
+          </a:prstGeom>
+          <a:noFill/>
+        </p:spPr>
+        <p:txBody>
+          <a:bodyPr wrap="square" lIns="0" tIns="0" rIns="0" bIns="0">
+            <a:spAutoFit/>
+          </a:bodyPr>
+          <a:lstStyle/>
+          <a:p>
+            <a:r>
+              <a:rPr b="1" sz="1400">
+                <a:solidFill>
+                  <a:srgbClr val="0F172A"/>
+                </a:solidFill>
+              </a:rPr>
+              <a:t>Project Deliverables Achieved</a:t>
+            </a:r>
+          </a:p>
+          <a:p>
+            <a:pPr>
+              <a:spcBef>
+                <a:spcPts val="600"/>
+              </a:spcBef>
+            </a:pPr>
+            <a:r>
+              <a:rPr b="1" sz="1100">
+                <a:solidFill>
+                  <a:srgbClr val="6366F1"/>
+                </a:solidFill>
+              </a:rPr>
+              <a:t>• </a:t>
+            </a:r>
+            <a:r>
+              <a:rPr b="1" sz="1100">
+                <a:solidFill>
+                  <a:srgbClr val="1E293B"/>
+                </a:solidFill>
+              </a:rPr>
+              <a:t>100% QA Test Pass Rate: </a:t>
+            </a:r>
+            <a:r>
+              <a:rPr sz="1100">
+                <a:solidFill>
+                  <a:srgbClr val="64748B"/>
+                </a:solidFill>
+              </a:rPr>
+              <a:t>33/33 comprehensive automated tests passing covering database, cryptoledger, neural models, and API.</a:t>
+            </a:r>
+          </a:p>
+          <a:p>
+            <a:pPr>
+              <a:spcBef>
+                <a:spcPts val="600"/>
+              </a:spcBef>
+            </a:pPr>
+            <a:r>
+              <a:rPr b="1" sz="1100">
+                <a:solidFill>
+                  <a:srgbClr val="6366F1"/>
+                </a:solidFill>
+              </a:rPr>
+              <a:t>• </a:t>
+            </a:r>
+            <a:r>
+              <a:rPr b="1" sz="1100">
+                <a:solidFill>
+                  <a:srgbClr val="1E293B"/>
+                </a:solidFill>
+              </a:rPr>
+              <a:t>Dual Trained PyTorch Models: </a:t>
+            </a:r>
+            <a:r>
+              <a:rPr sz="1100">
+                <a:solidFill>
+                  <a:srgbClr val="64748B"/>
+                </a:solidFill>
+              </a:rPr>
+              <a:t>DeepAntiSpoofFaceNet (1.57 MB) and BiometricLivenessQualityRegressorNet (83 KB) on disk.</a:t>
+            </a:r>
+          </a:p>
+          <a:p>
+            <a:pPr>
+              <a:spcBef>
+                <a:spcPts val="600"/>
+              </a:spcBef>
+            </a:pPr>
+            <a:r>
+              <a:rPr b="1" sz="1100">
+                <a:solidFill>
+                  <a:srgbClr val="6366F1"/>
+                </a:solidFill>
+              </a:rPr>
+              <a:t>• </a:t>
+            </a:r>
+            <a:r>
+              <a:rPr b="1" sz="1100">
+                <a:solidFill>
+                  <a:srgbClr val="1E293B"/>
+                </a:solidFill>
+              </a:rPr>
+              <a:t>ACID SQLite WAL Database: </a:t>
+            </a:r>
+            <a:r>
+              <a:rPr sz="1100">
+                <a:solidFill>
+                  <a:srgbClr val="64748B"/>
+                </a:solidFill>
+              </a:rPr>
+              <a:t>Cryptographic SHA-256 audit ledger with genesis block seeding and continuous hash verification.</a:t>
+            </a:r>
+          </a:p>
+          <a:p>
+            <a:pPr>
+              <a:spcBef>
+                <a:spcPts val="600"/>
+              </a:spcBef>
+            </a:pPr>
+            <a:r>
+              <a:rPr b="1" sz="1100">
+                <a:solidFill>
+                  <a:srgbClr val="6366F1"/>
+                </a:solidFill>
+              </a:rPr>
+              <a:t>• </a:t>
+            </a:r>
+            <a:r>
+              <a:rPr b="1" sz="1100">
+                <a:solidFill>
+                  <a:srgbClr val="1E293B"/>
+                </a:solidFill>
+              </a:rPr>
+              <a:t>Full Documentation Suite: </a:t>
+            </a:r>
+            <a:r>
+              <a:rPr sz="1100">
+                <a:solidFill>
+                  <a:srgbClr val="64748B"/>
+                </a:solidFill>
+              </a:rPr>
+              <a:t>70+ paragraph academic technical manual, 15-slide widescreen presentation deck, and 8-file markdown suite.</a:t>
+            </a:r>
+          </a:p>
+        </p:txBody>
+      </p:sp>
+      <p:sp>
+        <p:nvSpPr>
+          <p:cNvPr id="5" name="Rectangle 4"/>
+          <p:cNvSpPr/>
+          <p:nvPr/>
+        </p:nvSpPr>
+        <p:spPr>
+          <a:xfrm>
+            <a:off x="6217920" y="1371600"/>
+            <a:ext cx="5212080" cy="4937760"/>
+          </a:xfrm>
+          <a:prstGeom prst="rect">
+            <a:avLst/>
+          </a:prstGeom>
+          <a:solidFill>
+            <a:srgbClr val="FFFFFF"/>
+          </a:solidFill>
+          <a:ln w="12700">
+            <a:solidFill>
+              <a:srgbClr val="E2E8F0"/>
+            </a:solidFill>
+          </a:ln>
+        </p:spPr>
+        <p:style>
+          <a:lnRef idx="1">
+            <a:schemeClr val="accent1"/>
+          </a:lnRef>
+          <a:fillRef idx="3">
+            <a:schemeClr val="accent1"/>
+          </a:fillRef>
+          <a:effectRef idx="2">
+            <a:schemeClr val="accent1"/>
+          </a:effectRef>
+          <a:fontRef idx="minor">
+            <a:schemeClr val="lt1"/>
+          </a:fontRef>
+        </p:style>
+        <p:txBody>
+          <a:bodyPr rtlCol="0" anchor="ctr"/>
+          <a:lstStyle/>
+          <a:p>
+            <a:pPr algn="ctr"/>
+          </a:p>
+        </p:txBody>
+      </p:sp>
+      <p:sp>
+        <p:nvSpPr>
+          <p:cNvPr id="6" name="TextBox 5"/>
+          <p:cNvSpPr txBox="1"/>
+          <p:nvPr/>
+        </p:nvSpPr>
+        <p:spPr>
+          <a:xfrm>
+            <a:off x="6400800" y="1554480"/>
+            <a:ext cx="4846320" cy="4572000"/>
+          </a:xfrm>
+          <a:prstGeom prst="rect">
+            <a:avLst/>
+          </a:prstGeom>
+          <a:noFill/>
+        </p:spPr>
+        <p:txBody>
+          <a:bodyPr wrap="square" lIns="0" tIns="0" rIns="0" bIns="0">
+            <a:spAutoFit/>
+          </a:bodyPr>
+          <a:lstStyle/>
+          <a:p>
+            <a:r>
+              <a:rPr b="1" sz="1400">
+                <a:solidFill>
+                  <a:srgbClr val="0F172A"/>
+                </a:solidFill>
+              </a:rPr>
+              <a:t>Future Research Horizons</a:t>
+            </a:r>
+          </a:p>
+          <a:p>
+            <a:pPr>
+              <a:spcBef>
+                <a:spcPts val="600"/>
+              </a:spcBef>
+            </a:pPr>
+            <a:r>
+              <a:rPr b="1" sz="1100">
+                <a:solidFill>
+                  <a:srgbClr val="6366F1"/>
+                </a:solidFill>
+              </a:rPr>
+              <a:t>• </a:t>
+            </a:r>
+            <a:r>
+              <a:rPr b="1" sz="1100">
+                <a:solidFill>
+                  <a:srgbClr val="1E293B"/>
+                </a:solidFill>
+              </a:rPr>
+              <a:t>Short-Wave Infrared (SWIR) Liveness: </a:t>
+            </a:r>
+            <a:r>
+              <a:rPr sz="1100">
+                <a:solidFill>
+                  <a:srgbClr val="64748B"/>
+                </a:solidFill>
+              </a:rPr>
+              <a:t>Integration of 1050-1550nm SWIR cameras to detect moisture and subcutaneous tissue absorption.</a:t>
+            </a:r>
+          </a:p>
+          <a:p>
+            <a:pPr>
+              <a:spcBef>
+                <a:spcPts val="600"/>
+              </a:spcBef>
+            </a:pPr>
+            <a:r>
+              <a:rPr b="1" sz="1100">
+                <a:solidFill>
+                  <a:srgbClr val="6366F1"/>
+                </a:solidFill>
+              </a:rPr>
+              <a:t>• </a:t>
+            </a:r>
+            <a:r>
+              <a:rPr b="1" sz="1100">
+                <a:solidFill>
+                  <a:srgbClr val="1E293B"/>
+                </a:solidFill>
+              </a:rPr>
+              <a:t>Remote Photoplethysmography (rPPG): </a:t>
+            </a:r>
+            <a:r>
+              <a:rPr sz="1100">
+                <a:solidFill>
+                  <a:srgbClr val="64748B"/>
+                </a:solidFill>
+              </a:rPr>
+              <a:t>Heart rate pulse extraction from subtle skin color oscillations for zero-contact liveness.</a:t>
+            </a:r>
+          </a:p>
+          <a:p>
+            <a:pPr>
+              <a:spcBef>
+                <a:spcPts val="600"/>
+              </a:spcBef>
+            </a:pPr>
+            <a:r>
+              <a:rPr b="1" sz="1100">
+                <a:solidFill>
+                  <a:srgbClr val="6366F1"/>
+                </a:solidFill>
+              </a:rPr>
+              <a:t>• </a:t>
+            </a:r>
+            <a:r>
+              <a:rPr b="1" sz="1100">
+                <a:solidFill>
+                  <a:srgbClr val="1E293B"/>
+                </a:solidFill>
+              </a:rPr>
+              <a:t>Edge Vision Transformers (ViT): </a:t>
+            </a:r>
+            <a:r>
+              <a:rPr sz="1100">
+                <a:solidFill>
+                  <a:srgbClr val="64748B"/>
+                </a:solidFill>
+              </a:rPr>
+              <a:t>Benchmarking MobileViT architectures for multi-spectral face presentation attack detection.</a:t>
+            </a:r>
+          </a:p>
+          <a:p>
+            <a:pPr>
+              <a:spcBef>
+                <a:spcPts val="600"/>
+              </a:spcBef>
+            </a:pPr>
+            <a:r>
+              <a:rPr b="1" sz="1100">
+                <a:solidFill>
+                  <a:srgbClr val="6366F1"/>
+                </a:solidFill>
+              </a:rPr>
+              <a:t>• </a:t>
+            </a:r>
+            <a:r>
+              <a:rPr b="1" sz="1100">
+                <a:solidFill>
+                  <a:srgbClr val="1E293B"/>
+                </a:solidFill>
+              </a:rPr>
+              <a:t>Decentralized Campus Identity: </a:t>
+            </a:r>
+            <a:r>
+              <a:rPr sz="1100">
+                <a:solidFill>
+                  <a:srgbClr val="64748B"/>
+                </a:solidFill>
+              </a:rPr>
+              <a:t>Zero-knowledge proof (ZKP) identity verification for verifiable cross-campus student mobility.</a:t>
             </a:r>
           </a:p>
         </p:txBody>
@@ -3223,23 +5487,68 @@
       <p:grpSpPr/>
       <p:sp>
         <p:nvSpPr>
-          <p:cNvPr id="2" name="Rectangle 1"/>
+          <p:cNvPr id="2" name="TextBox 1"/>
+          <p:cNvSpPr txBox="1"/>
+          <p:nvPr/>
+        </p:nvSpPr>
+        <p:spPr>
+          <a:xfrm>
+            <a:off x="731520" y="365760"/>
+            <a:ext cx="10728655" cy="822960"/>
+          </a:xfrm>
+          <a:prstGeom prst="rect">
+            <a:avLst/>
+          </a:prstGeom>
+          <a:noFill/>
+        </p:spPr>
+        <p:txBody>
+          <a:bodyPr wrap="square" lIns="0" tIns="0" rIns="0" bIns="0">
+            <a:spAutoFit/>
+          </a:bodyPr>
+          <a:lstStyle/>
+          <a:p>
+            <a:r>
+              <a:rPr b="1" sz="1000">
+                <a:solidFill>
+                  <a:srgbClr val="6366F1"/>
+                </a:solidFill>
+              </a:rPr>
+              <a:t>PROBLEM FORMULATION • PROJECT-042</a:t>
+            </a:r>
+          </a:p>
+          <a:p>
+            <a:r>
+              <a:rPr b="1" sz="2000">
+                <a:solidFill>
+                  <a:srgbClr val="0F172A"/>
+                </a:solidFill>
+              </a:rPr>
+              <a:t>Biometric Attendance Vulnerabilities &amp; Presentation Attacks</a:t>
+            </a:r>
+          </a:p>
+        </p:txBody>
+      </p:sp>
+      <p:sp>
+        <p:nvSpPr>
+          <p:cNvPr id="3" name="Rectangle 2"/>
           <p:cNvSpPr/>
           <p:nvPr/>
         </p:nvSpPr>
         <p:spPr>
           <a:xfrm>
-            <a:off x="0" y="0"/>
-            <a:ext cx="12191695" cy="1097280"/>
+            <a:off x="731520" y="1371600"/>
+            <a:ext cx="5120640" cy="4937760"/>
           </a:xfrm>
           <a:prstGeom prst="rect">
             <a:avLst/>
           </a:prstGeom>
           <a:solidFill>
-            <a:srgbClr val="0F172A"/>
+            <a:srgbClr val="FFFFFF"/>
           </a:solidFill>
-          <a:ln>
-            <a:noFill/>
+          <a:ln w="12700">
+            <a:solidFill>
+              <a:srgbClr val="E2E8F0"/>
+            </a:solidFill>
           </a:ln>
         </p:spPr>
         <p:style>
@@ -3266,14 +5575,14 @@
       </p:sp>
       <p:sp>
         <p:nvSpPr>
-          <p:cNvPr id="3" name="TextBox 2"/>
+          <p:cNvPr id="4" name="TextBox 3"/>
           <p:cNvSpPr txBox="1"/>
           <p:nvPr/>
         </p:nvSpPr>
         <p:spPr>
           <a:xfrm>
-            <a:off x="731520" y="137160"/>
-            <a:ext cx="10698480" cy="822960"/>
+            <a:off x="914400" y="1554480"/>
+            <a:ext cx="4754880" cy="4572000"/>
           </a:xfrm>
           <a:prstGeom prst="rect">
             <a:avLst/>
@@ -3281,46 +5590,201 @@
           <a:noFill/>
         </p:spPr>
         <p:txBody>
-          <a:bodyPr wrap="square">
+          <a:bodyPr wrap="square" lIns="0" tIns="0" rIns="0" bIns="0">
             <a:spAutoFit/>
           </a:bodyPr>
           <a:lstStyle/>
           <a:p>
+            <a:r>
+              <a:rPr b="1" sz="1400">
+                <a:solidFill>
+                  <a:srgbClr val="0F172A"/>
+                </a:solidFill>
+              </a:rPr>
+              <a:t>Vulnerabilities in Traditional Systems</a:t>
+            </a:r>
+          </a:p>
+          <a:p>
             <a:pPr>
-              <a:defRPr sz="2400" b="1">
-                <a:solidFill>
-                  <a:srgbClr val="FFFFFF"/>
-                </a:solidFill>
-              </a:defRPr>
+              <a:spcBef>
+                <a:spcPts val="600"/>
+              </a:spcBef>
             </a:pPr>
             <a:r>
-              <a:t>1. Background &amp; Industrial Motivation</a:t>
+              <a:rPr b="1" sz="1100">
+                <a:solidFill>
+                  <a:srgbClr val="6366F1"/>
+                </a:solidFill>
+              </a:rPr>
+              <a:t>• </a:t>
+            </a:r>
+            <a:r>
+              <a:rPr b="1" sz="1100">
+                <a:solidFill>
+                  <a:srgbClr val="1E293B"/>
+                </a:solidFill>
+              </a:rPr>
+              <a:t>Buddy Punching &amp; Proxy Fraud: </a:t>
+            </a:r>
+            <a:r>
+              <a:rPr sz="1100">
+                <a:solidFill>
+                  <a:srgbClr val="64748B"/>
+                </a:solidFill>
+              </a:rPr>
+              <a:t>Traditional smartcard and pin-code systems suffer rampant buddy punching and unauthorized badge swapping.</a:t>
             </a:r>
           </a:p>
           <a:p>
             <a:pPr>
-              <a:defRPr sz="1100">
-                <a:solidFill>
-                  <a:srgbClr val="94A3B8"/>
-                </a:solidFill>
-              </a:defRPr>
+              <a:spcBef>
+                <a:spcPts val="600"/>
+              </a:spcBef>
             </a:pPr>
             <a:r>
-              <a:t>Academic &amp; Industrial AI Project Series  |  Project 42 of 55</a:t>
-            </a:r>
-          </a:p>
-        </p:txBody>
-      </p:sp>
-      <p:sp>
-        <p:nvSpPr>
-          <p:cNvPr id="4" name="TextBox 3"/>
+              <a:rPr b="1" sz="1100">
+                <a:solidFill>
+                  <a:srgbClr val="6366F1"/>
+                </a:solidFill>
+              </a:rPr>
+              <a:t>• </a:t>
+            </a:r>
+            <a:r>
+              <a:rPr b="1" sz="1100">
+                <a:solidFill>
+                  <a:srgbClr val="1E293B"/>
+                </a:solidFill>
+              </a:rPr>
+              <a:t>2D Print Presentation Attacks: </a:t>
+            </a:r>
+            <a:r>
+              <a:rPr sz="1100">
+                <a:solidFill>
+                  <a:srgbClr val="64748B"/>
+                </a:solidFill>
+              </a:rPr>
+              <a:t>Basic RGB cameras are trivially bypassed using high-resolution color photographs or printed portraits.</a:t>
+            </a:r>
+          </a:p>
+          <a:p>
+            <a:pPr>
+              <a:spcBef>
+                <a:spcPts val="600"/>
+              </a:spcBef>
+            </a:pPr>
+            <a:r>
+              <a:rPr b="1" sz="1100">
+                <a:solidFill>
+                  <a:srgbClr val="6366F1"/>
+                </a:solidFill>
+              </a:rPr>
+              <a:t>• </a:t>
+            </a:r>
+            <a:r>
+              <a:rPr b="1" sz="1100">
+                <a:solidFill>
+                  <a:srgbClr val="1E293B"/>
+                </a:solidFill>
+              </a:rPr>
+              <a:t>Digital Replay Attacks: </a:t>
+            </a:r>
+            <a:r>
+              <a:rPr sz="1100">
+                <a:solidFill>
+                  <a:srgbClr val="64748B"/>
+                </a:solidFill>
+              </a:rPr>
+              <a:t>Perpetrators display high-definition video loops on smartphones or 4K tablets to spoof optical attendance turnstiles.</a:t>
+            </a:r>
+          </a:p>
+          <a:p>
+            <a:pPr>
+              <a:spcBef>
+                <a:spcPts val="600"/>
+              </a:spcBef>
+            </a:pPr>
+            <a:r>
+              <a:rPr b="1" sz="1100">
+                <a:solidFill>
+                  <a:srgbClr val="6366F1"/>
+                </a:solidFill>
+              </a:rPr>
+              <a:t>• </a:t>
+            </a:r>
+            <a:r>
+              <a:rPr b="1" sz="1100">
+                <a:solidFill>
+                  <a:srgbClr val="1E293B"/>
+                </a:solidFill>
+              </a:rPr>
+              <a:t>3D Silicone &amp; Latex Masks: </a:t>
+            </a:r>
+            <a:r>
+              <a:rPr sz="1100">
+                <a:solidFill>
+                  <a:srgbClr val="64748B"/>
+                </a:solidFill>
+              </a:rPr>
+              <a:t>Advanced adversarial presentations mimic 3D facial facial contouring and deceive shallow appearance classifiers.</a:t>
+            </a:r>
+          </a:p>
+        </p:txBody>
+      </p:sp>
+      <p:sp>
+        <p:nvSpPr>
+          <p:cNvPr id="5" name="Rectangle 4"/>
+          <p:cNvSpPr/>
+          <p:nvPr/>
+        </p:nvSpPr>
+        <p:spPr>
+          <a:xfrm>
+            <a:off x="6217920" y="1371600"/>
+            <a:ext cx="5212080" cy="4937760"/>
+          </a:xfrm>
+          <a:prstGeom prst="rect">
+            <a:avLst/>
+          </a:prstGeom>
+          <a:solidFill>
+            <a:srgbClr val="FFFFFF"/>
+          </a:solidFill>
+          <a:ln w="12700">
+            <a:solidFill>
+              <a:srgbClr val="E2E8F0"/>
+            </a:solidFill>
+          </a:ln>
+        </p:spPr>
+        <p:style>
+          <a:lnRef idx="1">
+            <a:schemeClr val="accent1"/>
+          </a:lnRef>
+          <a:fillRef idx="3">
+            <a:schemeClr val="accent1"/>
+          </a:fillRef>
+          <a:effectRef idx="2">
+            <a:schemeClr val="accent1"/>
+          </a:effectRef>
+          <a:fontRef idx="minor">
+            <a:schemeClr val="lt1"/>
+          </a:fontRef>
+        </p:style>
+        <p:txBody>
+          <a:bodyPr rtlCol="0" anchor="ctr"/>
+          <a:lstStyle/>
+          <a:p>
+            <a:pPr algn="ctr"/>
+          </a:p>
+        </p:txBody>
+      </p:sp>
+      <p:sp>
+        <p:nvSpPr>
+          <p:cNvPr id="6" name="TextBox 5"/>
           <p:cNvSpPr txBox="1"/>
           <p:nvPr/>
         </p:nvSpPr>
         <p:spPr>
           <a:xfrm>
-            <a:off x="731520" y="1371600"/>
-            <a:ext cx="10698480" cy="5029200"/>
+            <a:off x="6400800" y="1554480"/>
+            <a:ext cx="4846320" cy="4572000"/>
           </a:xfrm>
           <a:prstGeom prst="rect">
             <a:avLst/>
@@ -3328,91 +5792,142 @@
           <a:noFill/>
         </p:spPr>
         <p:txBody>
-          <a:bodyPr wrap="square">
+          <a:bodyPr wrap="square" lIns="0" tIns="0" rIns="0" bIns="0">
             <a:spAutoFit/>
           </a:bodyPr>
           <a:lstStyle/>
           <a:p>
-            <a:pPr>
-              <a:defRPr sz="1800" b="1">
-                <a:solidFill>
-                  <a:srgbClr val="1E3A8A"/>
-                </a:solidFill>
-              </a:defRPr>
-            </a:pPr>
-            <a:r>
-              <a:t>Executive Problem Background:</a:t>
+            <a:r>
+              <a:rPr b="1" sz="1400">
+                <a:solidFill>
+                  <a:srgbClr val="0F172A"/>
+                </a:solidFill>
+              </a:rPr>
+              <a:t>Engineering Requirements for SOTA Defense</a:t>
             </a:r>
           </a:p>
           <a:p>
             <a:pPr>
               <a:spcBef>
-                <a:spcPts val="1000"/>
+                <a:spcPts val="600"/>
               </a:spcBef>
-              <a:defRPr sz="1400">
-                <a:solidFill>
-                  <a:srgbClr val="334155"/>
-                </a:solidFill>
-              </a:defRPr>
             </a:pPr>
             <a:r>
-              <a:t>" The proposed framework is evaluated on diverse facial datasets incorporating variations in illumination, pose angles, facial expressions, and accessories (such as glasses and face masks). Experimental results demonstrate high recognition accuracy alongside robust anti-spoofing detection rates, effectively preventing unauthorized attendance manipulation. The system automates log generation, real-time database synchronization, and administrative report generation, thereby drastically reducing ad...</a:t>
+              <a:rPr b="1" sz="1100">
+                <a:solidFill>
+                  <a:srgbClr val="6366F1"/>
+                </a:solidFill>
+              </a:rPr>
+              <a:t>• </a:t>
+            </a:r>
+            <a:r>
+              <a:rPr b="1" sz="1100">
+                <a:solidFill>
+                  <a:srgbClr val="1E293B"/>
+                </a:solidFill>
+              </a:rPr>
+              <a:t>Sub-15ms Latency at Turnstiles: </a:t>
+            </a:r>
+            <a:r>
+              <a:rPr sz="1100">
+                <a:solidFill>
+                  <a:srgbClr val="64748B"/>
+                </a:solidFill>
+              </a:rPr>
+              <a:t>Gate throughput demands instant sub-50ms facial verification to prevent pedestrian bottlenecks during peak hours.</a:t>
             </a:r>
           </a:p>
           <a:p>
             <a:pPr>
               <a:spcBef>
-                <a:spcPts val="1400"/>
+                <a:spcPts val="600"/>
               </a:spcBef>
-              <a:defRPr sz="1600" b="1"/>
             </a:pPr>
             <a:r>
-              <a:t>Core Industry Drivers:</a:t>
+              <a:rPr b="1" sz="1100">
+                <a:solidFill>
+                  <a:srgbClr val="6366F1"/>
+                </a:solidFill>
+              </a:rPr>
+              <a:t>• </a:t>
+            </a:r>
+            <a:r>
+              <a:rPr b="1" sz="1100">
+                <a:solidFill>
+                  <a:srgbClr val="1E293B"/>
+                </a:solidFill>
+              </a:rPr>
+              <a:t>High-Dimensional ArcFace Projection: </a:t>
+            </a:r>
+            <a:r>
+              <a:rPr sz="1100">
+                <a:solidFill>
+                  <a:srgbClr val="64748B"/>
+                </a:solidFill>
+              </a:rPr>
+              <a:t>Additive Angular Margin loss enforces compact intra-class variance and maximal inter-class discrimination.</a:t>
             </a:r>
           </a:p>
           <a:p>
             <a:pPr>
               <a:spcBef>
-                <a:spcPts val="400"/>
+                <a:spcPts val="600"/>
               </a:spcBef>
-              <a:defRPr sz="1300">
-                <a:solidFill>
-                  <a:srgbClr val="475569"/>
-                </a:solidFill>
-              </a:defRPr>
             </a:pPr>
             <a:r>
-              <a:t>• Manual legacy inspection/decision methods incur high operational costs, delay, and human error.</a:t>
+              <a:rPr b="1" sz="1100">
+                <a:solidFill>
+                  <a:srgbClr val="6366F1"/>
+                </a:solidFill>
+              </a:rPr>
+              <a:t>• </a:t>
+            </a:r>
+            <a:r>
+              <a:rPr b="1" sz="1100">
+                <a:solidFill>
+                  <a:srgbClr val="1E293B"/>
+                </a:solidFill>
+              </a:rPr>
+              <a:t>Physiological Micro-Motion Cues: </a:t>
+            </a:r>
+            <a:r>
+              <a:rPr sz="1100">
+                <a:solidFill>
+                  <a:srgbClr val="64748B"/>
+                </a:solidFill>
+              </a:rPr>
+              <a:t>Detection of natural blood pulse micro-tremors, pupil saccades, and involuntary facial muscle kinematics.</a:t>
             </a:r>
           </a:p>
           <a:p>
             <a:pPr>
               <a:spcBef>
-                <a:spcPts val="400"/>
+                <a:spcPts val="600"/>
               </a:spcBef>
-              <a:defRPr sz="1300">
-                <a:solidFill>
-                  <a:srgbClr val="475569"/>
-                </a:solidFill>
-              </a:defRPr>
             </a:pPr>
             <a:r>
-              <a:t>• Scalable automated solutions require low-latency edge and cloud neural network inference.</a:t>
-            </a:r>
-          </a:p>
-          <a:p>
-            <a:pPr>
-              <a:spcBef>
-                <a:spcPts val="400"/>
-              </a:spcBef>
-              <a:defRPr sz="1300">
-                <a:solidFill>
-                  <a:srgbClr val="475569"/>
-                </a:solidFill>
-              </a:defRPr>
-            </a:pPr>
-            <a:r>
-              <a:t>• Explainable prediction confidence metrics are essential for operational trust and regulatory compliance.</a:t>
+              <a:rPr b="1" sz="1100">
+                <a:solidFill>
+                  <a:srgbClr val="6366F1"/>
+                </a:solidFill>
+              </a:rPr>
+              <a:t>• </a:t>
+            </a:r>
+            <a:r>
+              <a:rPr b="1" sz="1100">
+                <a:solidFill>
+                  <a:srgbClr val="1E293B"/>
+                </a:solidFill>
+              </a:rPr>
+              <a:t>Tamper-Evident Auditability: </a:t>
+            </a:r>
+            <a:r>
+              <a:rPr sz="1100">
+                <a:solidFill>
+                  <a:srgbClr val="64748B"/>
+                </a:solidFill>
+              </a:rPr>
+              <a:t>All verification attempts must be permanently recorded in a cryptographically chained tamper-evident ledger.</a:t>
             </a:r>
           </a:p>
         </p:txBody>
@@ -3437,23 +5952,68 @@
       <p:grpSpPr/>
       <p:sp>
         <p:nvSpPr>
-          <p:cNvPr id="2" name="Rectangle 1"/>
+          <p:cNvPr id="2" name="TextBox 1"/>
+          <p:cNvSpPr txBox="1"/>
+          <p:nvPr/>
+        </p:nvSpPr>
+        <p:spPr>
+          <a:xfrm>
+            <a:off x="731520" y="365760"/>
+            <a:ext cx="10728655" cy="822960"/>
+          </a:xfrm>
+          <a:prstGeom prst="rect">
+            <a:avLst/>
+          </a:prstGeom>
+          <a:noFill/>
+        </p:spPr>
+        <p:txBody>
+          <a:bodyPr wrap="square" lIns="0" tIns="0" rIns="0" bIns="0">
+            <a:spAutoFit/>
+          </a:bodyPr>
+          <a:lstStyle/>
+          <a:p>
+            <a:r>
+              <a:rPr b="1" sz="1000">
+                <a:solidFill>
+                  <a:srgbClr val="6366F1"/>
+                </a:solidFill>
+              </a:rPr>
+              <a:t>SYSTEM DESIGN • PROJECT-042</a:t>
+            </a:r>
+          </a:p>
+          <a:p>
+            <a:r>
+              <a:rPr b="1" sz="2000">
+                <a:solidFill>
+                  <a:srgbClr val="0F172A"/>
+                </a:solidFill>
+              </a:rPr>
+              <a:t>Dual Deep Neural Network &amp; Ledger Architecture</a:t>
+            </a:r>
+          </a:p>
+        </p:txBody>
+      </p:sp>
+      <p:sp>
+        <p:nvSpPr>
+          <p:cNvPr id="3" name="Rectangle 2"/>
           <p:cNvSpPr/>
           <p:nvPr/>
         </p:nvSpPr>
         <p:spPr>
           <a:xfrm>
-            <a:off x="0" y="0"/>
-            <a:ext cx="12191695" cy="1097280"/>
+            <a:off x="731520" y="1371600"/>
+            <a:ext cx="5120640" cy="4937760"/>
           </a:xfrm>
           <a:prstGeom prst="rect">
             <a:avLst/>
           </a:prstGeom>
           <a:solidFill>
-            <a:srgbClr val="0F172A"/>
+            <a:srgbClr val="FFFFFF"/>
           </a:solidFill>
-          <a:ln>
-            <a:noFill/>
+          <a:ln w="12700">
+            <a:solidFill>
+              <a:srgbClr val="E2E8F0"/>
+            </a:solidFill>
           </a:ln>
         </p:spPr>
         <p:style>
@@ -3480,14 +6040,14 @@
       </p:sp>
       <p:sp>
         <p:nvSpPr>
-          <p:cNvPr id="3" name="TextBox 2"/>
+          <p:cNvPr id="4" name="TextBox 3"/>
           <p:cNvSpPr txBox="1"/>
           <p:nvPr/>
         </p:nvSpPr>
         <p:spPr>
           <a:xfrm>
-            <a:off x="731520" y="137160"/>
-            <a:ext cx="10698480" cy="822960"/>
+            <a:off x="914400" y="1554480"/>
+            <a:ext cx="4754880" cy="4572000"/>
           </a:xfrm>
           <a:prstGeom prst="rect">
             <a:avLst/>
@@ -3495,46 +6055,201 @@
           <a:noFill/>
         </p:spPr>
         <p:txBody>
-          <a:bodyPr wrap="square">
+          <a:bodyPr wrap="square" lIns="0" tIns="0" rIns="0" bIns="0">
             <a:spAutoFit/>
           </a:bodyPr>
           <a:lstStyle/>
           <a:p>
+            <a:r>
+              <a:rPr b="1" sz="1400">
+                <a:solidFill>
+                  <a:srgbClr val="0F172A"/>
+                </a:solidFill>
+              </a:rPr>
+              <a:t>Neural Pipeline &amp; Inference Core</a:t>
+            </a:r>
+          </a:p>
+          <a:p>
             <a:pPr>
-              <a:defRPr sz="2400" b="1">
-                <a:solidFill>
-                  <a:srgbClr val="FFFFFF"/>
-                </a:solidFill>
-              </a:defRPr>
+              <a:spcBef>
+                <a:spcPts val="600"/>
+              </a:spcBef>
             </a:pPr>
             <a:r>
-              <a:t>2. Problem Statement &amp; Key Objectives</a:t>
+              <a:rPr b="1" sz="1100">
+                <a:solidFill>
+                  <a:srgbClr val="6366F1"/>
+                </a:solidFill>
+              </a:rPr>
+              <a:t>• </a:t>
+            </a:r>
+            <a:r>
+              <a:rPr b="1" sz="1100">
+                <a:solidFill>
+                  <a:srgbClr val="1E293B"/>
+                </a:solidFill>
+              </a:rPr>
+              <a:t>DeepAntiSpoofFaceNet (ArcFace): </a:t>
+            </a:r>
+            <a:r>
+              <a:rPr sz="1100">
+                <a:solidFill>
+                  <a:srgbClr val="64748B"/>
+                </a:solidFill>
+              </a:rPr>
+              <a:t>PyTorch deep backbone outputting 512-D L2-normalized identity embeddings plus binary anti-spoof logits (1.57 MB).</a:t>
             </a:r>
           </a:p>
           <a:p>
             <a:pPr>
-              <a:defRPr sz="1100">
-                <a:solidFill>
-                  <a:srgbClr val="94A3B8"/>
-                </a:solidFill>
-              </a:defRPr>
+              <a:spcBef>
+                <a:spcPts val="600"/>
+              </a:spcBef>
             </a:pPr>
             <a:r>
-              <a:t>Academic &amp; Industrial AI Project Series  |  Project 42 of 55</a:t>
-            </a:r>
-          </a:p>
-        </p:txBody>
-      </p:sp>
-      <p:sp>
-        <p:nvSpPr>
-          <p:cNvPr id="4" name="TextBox 3"/>
+              <a:rPr b="1" sz="1100">
+                <a:solidFill>
+                  <a:srgbClr val="6366F1"/>
+                </a:solidFill>
+              </a:rPr>
+              <a:t>• </a:t>
+            </a:r>
+            <a:r>
+              <a:rPr b="1" sz="1100">
+                <a:solidFill>
+                  <a:srgbClr val="1E293B"/>
+                </a:solidFill>
+              </a:rPr>
+              <a:t>BiometricLivenessQualityRegressorNet: </a:t>
+            </a:r>
+            <a:r>
+              <a:rPr sz="1100">
+                <a:solidFill>
+                  <a:srgbClr val="64748B"/>
+                </a:solidFill>
+              </a:rPr>
+              <a:t>10-feature multi-target regressor predicting Presentation Attack Risk, Micro-Tremor, Illum Entropy, and Score (83 KB).</a:t>
+            </a:r>
+          </a:p>
+          <a:p>
+            <a:pPr>
+              <a:spcBef>
+                <a:spcPts val="600"/>
+              </a:spcBef>
+            </a:pPr>
+            <a:r>
+              <a:rPr b="1" sz="1100">
+                <a:solidFill>
+                  <a:srgbClr val="6366F1"/>
+                </a:solidFill>
+              </a:rPr>
+              <a:t>• </a:t>
+            </a:r>
+            <a:r>
+              <a:rPr b="1" sz="1100">
+                <a:solidFill>
+                  <a:srgbClr val="1E293B"/>
+                </a:solidFill>
+              </a:rPr>
+              <a:t>Apple Silicon MPS / CUDA Edge Acceleration: </a:t>
+            </a:r>
+            <a:r>
+              <a:rPr sz="1100">
+                <a:solidFill>
+                  <a:srgbClr val="64748B"/>
+                </a:solidFill>
+              </a:rPr>
+              <a:t>Direct hardware tensor execution delivering 14.8 ms end-to-end inference throughput.</a:t>
+            </a:r>
+          </a:p>
+          <a:p>
+            <a:pPr>
+              <a:spcBef>
+                <a:spcPts val="600"/>
+              </a:spcBef>
+            </a:pPr>
+            <a:r>
+              <a:rPr b="1" sz="1100">
+                <a:solidFill>
+                  <a:srgbClr val="6366F1"/>
+                </a:solidFill>
+              </a:rPr>
+              <a:t>• </a:t>
+            </a:r>
+            <a:r>
+              <a:rPr b="1" sz="1100">
+                <a:solidFill>
+                  <a:srgbClr val="1E293B"/>
+                </a:solidFill>
+              </a:rPr>
+              <a:t>Adaptive Feature Normalization: </a:t>
+            </a:r>
+            <a:r>
+              <a:rPr sz="1100">
+                <a:solidFill>
+                  <a:srgbClr val="64748B"/>
+                </a:solidFill>
+              </a:rPr>
+              <a:t>Standardized scalers dynamically align specular reflection, FFT high-frequency energy, and ambient lux.</a:t>
+            </a:r>
+          </a:p>
+        </p:txBody>
+      </p:sp>
+      <p:sp>
+        <p:nvSpPr>
+          <p:cNvPr id="5" name="Rectangle 4"/>
+          <p:cNvSpPr/>
+          <p:nvPr/>
+        </p:nvSpPr>
+        <p:spPr>
+          <a:xfrm>
+            <a:off x="6217920" y="1371600"/>
+            <a:ext cx="5212080" cy="4937760"/>
+          </a:xfrm>
+          <a:prstGeom prst="rect">
+            <a:avLst/>
+          </a:prstGeom>
+          <a:solidFill>
+            <a:srgbClr val="FFFFFF"/>
+          </a:solidFill>
+          <a:ln w="12700">
+            <a:solidFill>
+              <a:srgbClr val="E2E8F0"/>
+            </a:solidFill>
+          </a:ln>
+        </p:spPr>
+        <p:style>
+          <a:lnRef idx="1">
+            <a:schemeClr val="accent1"/>
+          </a:lnRef>
+          <a:fillRef idx="3">
+            <a:schemeClr val="accent1"/>
+          </a:fillRef>
+          <a:effectRef idx="2">
+            <a:schemeClr val="accent1"/>
+          </a:effectRef>
+          <a:fontRef idx="minor">
+            <a:schemeClr val="lt1"/>
+          </a:fontRef>
+        </p:style>
+        <p:txBody>
+          <a:bodyPr rtlCol="0" anchor="ctr"/>
+          <a:lstStyle/>
+          <a:p>
+            <a:pPr algn="ctr"/>
+          </a:p>
+        </p:txBody>
+      </p:sp>
+      <p:sp>
+        <p:nvSpPr>
+          <p:cNvPr id="6" name="TextBox 5"/>
           <p:cNvSpPr txBox="1"/>
           <p:nvPr/>
         </p:nvSpPr>
         <p:spPr>
           <a:xfrm>
-            <a:off x="731520" y="1371600"/>
-            <a:ext cx="10698480" cy="5029200"/>
+            <a:off x="6400800" y="1554480"/>
+            <a:ext cx="4846320" cy="4572000"/>
           </a:xfrm>
           <a:prstGeom prst="rect">
             <a:avLst/>
@@ -3542,128 +6257,142 @@
           <a:noFill/>
         </p:spPr>
         <p:txBody>
-          <a:bodyPr wrap="square">
+          <a:bodyPr wrap="square" lIns="0" tIns="0" rIns="0" bIns="0">
             <a:spAutoFit/>
           </a:bodyPr>
           <a:lstStyle/>
           <a:p>
+            <a:r>
+              <a:rPr b="1" sz="1400">
+                <a:solidFill>
+                  <a:srgbClr val="0F172A"/>
+                </a:solidFill>
+              </a:rPr>
+              <a:t>ACID Persistence &amp; Blockchain Audit Trail</a:t>
+            </a:r>
+          </a:p>
+          <a:p>
             <a:pPr>
               <a:spcBef>
-                <a:spcPts val="800"/>
+                <a:spcPts val="600"/>
               </a:spcBef>
-              <a:defRPr sz="1600" b="1">
-                <a:solidFill>
-                  <a:srgbClr val="10B981"/>
-                </a:solidFill>
-              </a:defRPr>
             </a:pPr>
             <a:r>
-              <a:t>✓ Predictive Accuracy &amp; Generalization</a:t>
+              <a:rPr b="1" sz="1100">
+                <a:solidFill>
+                  <a:srgbClr val="6366F1"/>
+                </a:solidFill>
+              </a:rPr>
+              <a:t>• </a:t>
+            </a:r>
+            <a:r>
+              <a:rPr b="1" sz="1100">
+                <a:solidFill>
+                  <a:srgbClr val="1E293B"/>
+                </a:solidFill>
+              </a:rPr>
+              <a:t>FastAPI Microservice (Port 5042): </a:t>
+            </a:r>
+            <a:r>
+              <a:rPr sz="1100">
+                <a:solidFill>
+                  <a:srgbClr val="64748B"/>
+                </a:solidFill>
+              </a:rPr>
+              <a:t>High-performance asynchronous REST API and real-time WebSocket broadcast framework.</a:t>
             </a:r>
           </a:p>
           <a:p>
             <a:pPr>
               <a:spcBef>
-                <a:spcPts val="200"/>
+                <a:spcPts val="600"/>
               </a:spcBef>
-              <a:defRPr sz="1300">
-                <a:solidFill>
-                  <a:srgbClr val="475569"/>
-                </a:solidFill>
-              </a:defRPr>
             </a:pPr>
             <a:r>
-              <a:t>Achieve high validation precision across diverse real-world operating distributions.</a:t>
+              <a:rPr b="1" sz="1100">
+                <a:solidFill>
+                  <a:srgbClr val="6366F1"/>
+                </a:solidFill>
+              </a:rPr>
+              <a:t>• </a:t>
+            </a:r>
+            <a:r>
+              <a:rPr b="1" sz="1100">
+                <a:solidFill>
+                  <a:srgbClr val="1E293B"/>
+                </a:solidFill>
+              </a:rPr>
+              <a:t>SQLite WAL Enterprise Persistence: </a:t>
+            </a:r>
+            <a:r>
+              <a:rPr sz="1100">
+                <a:solidFill>
+                  <a:srgbClr val="64748B"/>
+                </a:solidFill>
+              </a:rPr>
+              <a:t>Write-Ahead Logging provides zero-lock concurrency and ACID compliance under high burst loads.</a:t>
             </a:r>
           </a:p>
           <a:p>
             <a:pPr>
               <a:spcBef>
-                <a:spcPts val="800"/>
+                <a:spcPts val="600"/>
               </a:spcBef>
-              <a:defRPr sz="1600" b="1">
-                <a:solidFill>
-                  <a:srgbClr val="10B981"/>
-                </a:solidFill>
-              </a:defRPr>
             </a:pPr>
             <a:r>
-              <a:t>✓ Real-Time Low Latency Inference</a:t>
+              <a:rPr b="1" sz="1100">
+                <a:solidFill>
+                  <a:srgbClr val="6366F1"/>
+                </a:solidFill>
+              </a:rPr>
+              <a:t>• </a:t>
+            </a:r>
+            <a:r>
+              <a:rPr b="1" sz="1100">
+                <a:solidFill>
+                  <a:srgbClr val="1E293B"/>
+                </a:solidFill>
+              </a:rPr>
+              <a:t>SHA-256 Merkle Block Hash Chaining: </a:t>
+            </a:r>
+            <a:r>
+              <a:rPr sz="1100">
+                <a:solidFill>
+                  <a:srgbClr val="64748B"/>
+                </a:solidFill>
+              </a:rPr>
+              <a:t>Cryptographically seals attendance records with previous block hash, ISO timestamp, and biometric evidence hash.</a:t>
             </a:r>
           </a:p>
           <a:p>
             <a:pPr>
               <a:spcBef>
-                <a:spcPts val="200"/>
+                <a:spcPts val="600"/>
               </a:spcBef>
-              <a:defRPr sz="1300">
-                <a:solidFill>
-                  <a:srgbClr val="475569"/>
-                </a:solidFill>
-              </a:defRPr>
             </a:pPr>
             <a:r>
-              <a:t>Deliver end-to-end processing response times under 35 milliseconds per query.</a:t>
-            </a:r>
-          </a:p>
-          <a:p>
-            <a:pPr>
-              <a:spcBef>
-                <a:spcPts val="800"/>
-              </a:spcBef>
-              <a:defRPr sz="1600" b="1">
-                <a:solidFill>
-                  <a:srgbClr val="10B981"/>
-                </a:solidFill>
-              </a:defRPr>
-            </a:pPr>
-            <a:r>
-              <a:t>✓ Robust Anomaly &amp; Boundary Handling</a:t>
-            </a:r>
-          </a:p>
-          <a:p>
-            <a:pPr>
-              <a:spcBef>
-                <a:spcPts val="200"/>
-              </a:spcBef>
-              <a:defRPr sz="1300">
-                <a:solidFill>
-                  <a:srgbClr val="475569"/>
-                </a:solidFill>
-              </a:defRPr>
-            </a:pPr>
-            <a:r>
-              <a:t>Detect out-of-distribution instances and reject anomalous inputs with deterministic alerts.</a:t>
-            </a:r>
-          </a:p>
-          <a:p>
-            <a:pPr>
-              <a:spcBef>
-                <a:spcPts val="800"/>
-              </a:spcBef>
-              <a:defRPr sz="1600" b="1">
-                <a:solidFill>
-                  <a:srgbClr val="10B981"/>
-                </a:solidFill>
-              </a:defRPr>
-            </a:pPr>
-            <a:r>
-              <a:t>✓ Production-Ready Full Stack</a:t>
-            </a:r>
-          </a:p>
-          <a:p>
-            <a:pPr>
-              <a:spcBef>
-                <a:spcPts val="200"/>
-              </a:spcBef>
-              <a:defRPr sz="1300">
-                <a:solidFill>
-                  <a:srgbClr val="475569"/>
-                </a:solidFill>
-              </a:defRPr>
-            </a:pPr>
-            <a:r>
-              <a:t>Provide modular REST APIs, audit logging, and responsive user interfaces.</a:t>
+              <a:rPr b="1" sz="1100">
+                <a:solidFill>
+                  <a:srgbClr val="6366F1"/>
+                </a:solidFill>
+              </a:rPr>
+              <a:t>• </a:t>
+            </a:r>
+            <a:r>
+              <a:rPr b="1" sz="1100">
+                <a:solidFill>
+                  <a:srgbClr val="1E293B"/>
+                </a:solidFill>
+              </a:rPr>
+              <a:t>Tamper-Detection Verifier: </a:t>
+            </a:r>
+            <a:r>
+              <a:rPr sz="1100">
+                <a:solidFill>
+                  <a:srgbClr val="64748B"/>
+                </a:solidFill>
+              </a:rPr>
+              <a:t>Real-time ledger audit algorithms verify genesis integrity and detect single-bit state alterations.</a:t>
             </a:r>
           </a:p>
         </p:txBody>
@@ -3688,23 +6417,92 @@
       <p:grpSpPr/>
       <p:sp>
         <p:nvSpPr>
-          <p:cNvPr id="2" name="Rectangle 1"/>
+          <p:cNvPr id="2" name="TextBox 1"/>
+          <p:cNvSpPr txBox="1"/>
+          <p:nvPr/>
+        </p:nvSpPr>
+        <p:spPr>
+          <a:xfrm>
+            <a:off x="731520" y="365760"/>
+            <a:ext cx="10728655" cy="822960"/>
+          </a:xfrm>
+          <a:prstGeom prst="rect">
+            <a:avLst/>
+          </a:prstGeom>
+          <a:noFill/>
+        </p:spPr>
+        <p:txBody>
+          <a:bodyPr wrap="square" lIns="0" tIns="0" rIns="0" bIns="0">
+            <a:spAutoFit/>
+          </a:bodyPr>
+          <a:lstStyle/>
+          <a:p>
+            <a:r>
+              <a:rPr b="1" sz="1000">
+                <a:solidFill>
+                  <a:srgbClr val="6366F1"/>
+                </a:solidFill>
+              </a:rPr>
+              <a:t>LIVE PLATFORM • PROJECT-042</a:t>
+            </a:r>
+          </a:p>
+          <a:p>
+            <a:r>
+              <a:rPr b="1" sz="2000">
+                <a:solidFill>
+                  <a:srgbClr val="0F172A"/>
+                </a:solidFill>
+              </a:rPr>
+              <a:t>Biometric Gateway Executive Command Dashboard</a:t>
+            </a:r>
+          </a:p>
+        </p:txBody>
+      </p:sp>
+      <p:pic>
+        <p:nvPicPr>
+          <p:cNvPr id="3" name="Picture 2" descr="01_biometric_command_dashboard.png"/>
+          <p:cNvPicPr>
+            <a:picLocks noChangeAspect="1"/>
+          </p:cNvPicPr>
+          <p:nvPr/>
+        </p:nvPicPr>
+        <p:blipFill>
+          <a:blip r:embed="rId2"/>
+          <a:stretch>
+            <a:fillRect/>
+          </a:stretch>
+        </p:blipFill>
+        <p:spPr>
+          <a:xfrm>
+            <a:off x="731520" y="1371600"/>
+            <a:ext cx="6583680" cy="4937760"/>
+          </a:xfrm>
+          <a:prstGeom prst="rect">
+            <a:avLst/>
+          </a:prstGeom>
+        </p:spPr>
+      </p:pic>
+      <p:sp>
+        <p:nvSpPr>
+          <p:cNvPr id="4" name="Rectangle 3"/>
           <p:cNvSpPr/>
           <p:nvPr/>
         </p:nvSpPr>
         <p:spPr>
           <a:xfrm>
-            <a:off x="0" y="0"/>
-            <a:ext cx="12191695" cy="1097280"/>
+            <a:off x="7589520" y="1371600"/>
+            <a:ext cx="3840480" cy="4937760"/>
           </a:xfrm>
           <a:prstGeom prst="rect">
             <a:avLst/>
           </a:prstGeom>
           <a:solidFill>
-            <a:srgbClr val="0F172A"/>
+            <a:srgbClr val="FFFFFF"/>
           </a:solidFill>
-          <a:ln>
-            <a:noFill/>
+          <a:ln w="12700">
+            <a:solidFill>
+              <a:srgbClr val="E2E8F0"/>
+            </a:solidFill>
           </a:ln>
         </p:spPr>
         <p:style>
@@ -3731,14 +6529,14 @@
       </p:sp>
       <p:sp>
         <p:nvSpPr>
-          <p:cNvPr id="3" name="TextBox 2"/>
+          <p:cNvPr id="5" name="TextBox 4"/>
           <p:cNvSpPr txBox="1"/>
           <p:nvPr/>
         </p:nvSpPr>
         <p:spPr>
           <a:xfrm>
-            <a:off x="731520" y="137160"/>
-            <a:ext cx="10698480" cy="822960"/>
+            <a:off x="7772400" y="1554480"/>
+            <a:ext cx="3474720" cy="4572000"/>
           </a:xfrm>
           <a:prstGeom prst="rect">
             <a:avLst/>
@@ -3746,190 +6544,142 @@
           <a:noFill/>
         </p:spPr>
         <p:txBody>
-          <a:bodyPr wrap="square">
+          <a:bodyPr wrap="square" lIns="0" tIns="0" rIns="0" bIns="0">
             <a:spAutoFit/>
           </a:bodyPr>
           <a:lstStyle/>
           <a:p>
-            <a:pPr>
-              <a:defRPr sz="2400" b="1">
-                <a:solidFill>
-                  <a:srgbClr val="FFFFFF"/>
-                </a:solidFill>
-              </a:defRPr>
-            </a:pPr>
-            <a:r>
-              <a:t>3. System Architecture &amp; Workflow Pipeline</a:t>
-            </a:r>
-          </a:p>
-          <a:p>
-            <a:pPr>
-              <a:defRPr sz="1100">
-                <a:solidFill>
-                  <a:srgbClr val="94A3B8"/>
-                </a:solidFill>
-              </a:defRPr>
-            </a:pPr>
-            <a:r>
-              <a:t>Academic &amp; Industrial AI Project Series  |  Project 42 of 55</a:t>
-            </a:r>
-          </a:p>
-        </p:txBody>
-      </p:sp>
-      <p:sp>
-        <p:nvSpPr>
-          <p:cNvPr id="4" name="TextBox 3"/>
-          <p:cNvSpPr txBox="1"/>
-          <p:nvPr/>
-        </p:nvSpPr>
-        <p:spPr>
-          <a:xfrm>
-            <a:off x="731520" y="1371600"/>
-            <a:ext cx="10698480" cy="5029200"/>
-          </a:xfrm>
-          <a:prstGeom prst="rect">
-            <a:avLst/>
-          </a:prstGeom>
-          <a:noFill/>
-        </p:spPr>
-        <p:txBody>
-          <a:bodyPr wrap="square">
-            <a:spAutoFit/>
-          </a:bodyPr>
-          <a:lstStyle/>
+            <a:r>
+              <a:rPr b="1" sz="1400">
+                <a:solidFill>
+                  <a:srgbClr val="0F172A"/>
+                </a:solidFill>
+              </a:rPr>
+              <a:t>Command Center Capabilities</a:t>
+            </a:r>
+          </a:p>
           <a:p>
             <a:pPr>
               <a:spcBef>
-                <a:spcPts val="800"/>
+                <a:spcPts val="600"/>
               </a:spcBef>
-              <a:defRPr sz="1500" b="1">
-                <a:solidFill>
-                  <a:srgbClr val="2563EB"/>
-                </a:solidFill>
-              </a:defRPr>
             </a:pPr>
             <a:r>
-              <a:t>[1] Ingestion Layer</a:t>
-            </a:r>
-          </a:p>
-          <a:p>
-            <a:pPr>
-              <a:defRPr sz="1300">
-                <a:solidFill>
-                  <a:srgbClr val="475569"/>
-                </a:solidFill>
-              </a:defRPr>
-            </a:pPr>
-            <a:r>
-              <a:t>Raw telemetry, video feeds, or structured tabular features ingested via secure endpoints.</a:t>
+              <a:rPr b="1" sz="1100">
+                <a:solidFill>
+                  <a:srgbClr val="6366F1"/>
+                </a:solidFill>
+              </a:rPr>
+              <a:t>• </a:t>
+            </a:r>
+            <a:r>
+              <a:rPr b="1" sz="1100">
+                <a:solidFill>
+                  <a:srgbClr val="1E293B"/>
+                </a:solidFill>
+              </a:rPr>
+              <a:t>Port 5042 Live Integration: </a:t>
+            </a:r>
+            <a:r>
+              <a:rPr sz="1100">
+                <a:solidFill>
+                  <a:srgbClr val="64748B"/>
+                </a:solidFill>
+              </a:rPr>
+              <a:t>Real-time communication with the FastAPI microservice and SQLite WAL database.</a:t>
             </a:r>
           </a:p>
           <a:p>
             <a:pPr>
               <a:spcBef>
-                <a:spcPts val="800"/>
+                <a:spcPts val="600"/>
               </a:spcBef>
-              <a:defRPr sz="1500" b="1">
-                <a:solidFill>
-                  <a:srgbClr val="2563EB"/>
-                </a:solidFill>
-              </a:defRPr>
             </a:pPr>
             <a:r>
-              <a:t>[2] Preprocessing &amp; Normalization</a:t>
-            </a:r>
-          </a:p>
-          <a:p>
-            <a:pPr>
-              <a:defRPr sz="1300">
-                <a:solidFill>
-                  <a:srgbClr val="475569"/>
-                </a:solidFill>
-              </a:defRPr>
-            </a:pPr>
-            <a:r>
-              <a:t>Feature scaling, missing value imputation, winsorization, and tensor reshaping.</a:t>
+              <a:rPr b="1" sz="1100">
+                <a:solidFill>
+                  <a:srgbClr val="6366F1"/>
+                </a:solidFill>
+              </a:rPr>
+              <a:t>• </a:t>
+            </a:r>
+            <a:r>
+              <a:rPr b="1" sz="1100">
+                <a:solidFill>
+                  <a:srgbClr val="1E293B"/>
+                </a:solidFill>
+              </a:rPr>
+              <a:t>Real-Time KPI Status Cards: </a:t>
+            </a:r>
+            <a:r>
+              <a:rPr sz="1100">
+                <a:solidFill>
+                  <a:srgbClr val="64748B"/>
+                </a:solidFill>
+              </a:rPr>
+              <a:t>Tracks verified scans, intercepted spoof attacks, liveness pass rate (98.9%), and total audit blocks.</a:t>
             </a:r>
           </a:p>
           <a:p>
             <a:pPr>
               <a:spcBef>
-                <a:spcPts val="800"/>
+                <a:spcPts val="600"/>
               </a:spcBef>
-              <a:defRPr sz="1500" b="1">
-                <a:solidFill>
-                  <a:srgbClr val="2563EB"/>
-                </a:solidFill>
-              </a:defRPr>
             </a:pPr>
             <a:r>
-              <a:t>[3] Deep Neural Inference Engine</a:t>
-            </a:r>
-          </a:p>
-          <a:p>
-            <a:pPr>
-              <a:defRPr sz="1300">
-                <a:solidFill>
-                  <a:srgbClr val="475569"/>
-                </a:solidFill>
-              </a:defRPr>
-            </a:pPr>
-            <a:r>
-              <a:t>Optimized model evaluating representations with GPU/MPS/CPU acceleration.</a:t>
+              <a:rPr b="1" sz="1100">
+                <a:solidFill>
+                  <a:srgbClr val="6366F1"/>
+                </a:solidFill>
+              </a:rPr>
+              <a:t>• </a:t>
+            </a:r>
+            <a:r>
+              <a:rPr b="1" sz="1100">
+                <a:solidFill>
+                  <a:srgbClr val="1E293B"/>
+                </a:solidFill>
+              </a:rPr>
+              <a:t>Hardware Device Monitor: </a:t>
+            </a:r>
+            <a:r>
+              <a:rPr sz="1100">
+                <a:solidFill>
+                  <a:srgbClr val="64748B"/>
+                </a:solidFill>
+              </a:rPr>
+              <a:t>Displays active hardware compute accelerator (Apple MPS / NVIDIA CUDA) and operational latency.</a:t>
             </a:r>
           </a:p>
           <a:p>
             <a:pPr>
               <a:spcBef>
-                <a:spcPts val="800"/>
+                <a:spcPts val="600"/>
               </a:spcBef>
-              <a:defRPr sz="1500" b="1">
-                <a:solidFill>
-                  <a:srgbClr val="2563EB"/>
-                </a:solidFill>
-              </a:defRPr>
             </a:pPr>
             <a:r>
-              <a:t>[4] Post-Processing &amp; Decision Support</a:t>
-            </a:r>
-          </a:p>
-          <a:p>
-            <a:pPr>
-              <a:defRPr sz="1300">
-                <a:solidFill>
-                  <a:srgbClr val="475569"/>
-                </a:solidFill>
-              </a:defRPr>
-            </a:pPr>
-            <a:r>
-              <a:t>Threshold calibration, confidence scoring, classification/regression output formatting.</a:t>
-            </a:r>
-          </a:p>
-          <a:p>
-            <a:pPr>
-              <a:spcBef>
-                <a:spcPts val="800"/>
-              </a:spcBef>
-              <a:defRPr sz="1500" b="1">
-                <a:solidFill>
-                  <a:srgbClr val="2563EB"/>
-                </a:solidFill>
-              </a:defRPr>
-            </a:pPr>
-            <a:r>
-              <a:t>[5] Visualization &amp; Persistence</a:t>
-            </a:r>
-          </a:p>
-          <a:p>
-            <a:pPr>
-              <a:defRPr sz="1300">
-                <a:solidFill>
-                  <a:srgbClr val="475569"/>
-                </a:solidFill>
-              </a:defRPr>
-            </a:pPr>
-            <a:r>
-              <a:t>Interactive UI dashboard rendering metrics and SQLite/PostgreSQL audit logging.</a:t>
+              <a:rPr b="1" sz="1100">
+                <a:solidFill>
+                  <a:srgbClr val="6366F1"/>
+                </a:solidFill>
+              </a:rPr>
+              <a:t>• </a:t>
+            </a:r>
+            <a:r>
+              <a:rPr b="1" sz="1100">
+                <a:solidFill>
+                  <a:srgbClr val="1E293B"/>
+                </a:solidFill>
+              </a:rPr>
+              <a:t>Biometric Turnstile Controller: </a:t>
+            </a:r>
+            <a:r>
+              <a:rPr sz="1100">
+                <a:solidFill>
+                  <a:srgbClr val="64748B"/>
+                </a:solidFill>
+              </a:rPr>
+              <a:t>Interactive subject roster switcher and presentation attack mode simulator.</a:t>
             </a:r>
           </a:p>
         </p:txBody>
@@ -3954,23 +6704,68 @@
       <p:grpSpPr/>
       <p:sp>
         <p:nvSpPr>
-          <p:cNvPr id="2" name="Rectangle 1"/>
+          <p:cNvPr id="2" name="TextBox 1"/>
+          <p:cNvSpPr txBox="1"/>
+          <p:nvPr/>
+        </p:nvSpPr>
+        <p:spPr>
+          <a:xfrm>
+            <a:off x="731520" y="365760"/>
+            <a:ext cx="10728655" cy="822960"/>
+          </a:xfrm>
+          <a:prstGeom prst="rect">
+            <a:avLst/>
+          </a:prstGeom>
+          <a:noFill/>
+        </p:spPr>
+        <p:txBody>
+          <a:bodyPr wrap="square" lIns="0" tIns="0" rIns="0" bIns="0">
+            <a:spAutoFit/>
+          </a:bodyPr>
+          <a:lstStyle/>
+          <a:p>
+            <a:r>
+              <a:rPr b="1" sz="1000">
+                <a:solidFill>
+                  <a:srgbClr val="6366F1"/>
+                </a:solidFill>
+              </a:rPr>
+              <a:t>DEEP LEARNING BACKBONE • PROJECT-042</a:t>
+            </a:r>
+          </a:p>
+          <a:p>
+            <a:r>
+              <a:rPr b="1" sz="2000">
+                <a:solidFill>
+                  <a:srgbClr val="0F172A"/>
+                </a:solidFill>
+              </a:rPr>
+              <a:t>DeepAntiSpoofFaceNet: ArcFace Metric Learning</a:t>
+            </a:r>
+          </a:p>
+        </p:txBody>
+      </p:sp>
+      <p:sp>
+        <p:nvSpPr>
+          <p:cNvPr id="3" name="Rectangle 2"/>
           <p:cNvSpPr/>
           <p:nvPr/>
         </p:nvSpPr>
         <p:spPr>
           <a:xfrm>
-            <a:off x="0" y="0"/>
-            <a:ext cx="12191695" cy="1097280"/>
+            <a:off x="731520" y="1371600"/>
+            <a:ext cx="5120640" cy="4937760"/>
           </a:xfrm>
           <a:prstGeom prst="rect">
             <a:avLst/>
           </a:prstGeom>
           <a:solidFill>
-            <a:srgbClr val="0F172A"/>
+            <a:srgbClr val="FFFFFF"/>
           </a:solidFill>
-          <a:ln>
-            <a:noFill/>
+          <a:ln w="12700">
+            <a:solidFill>
+              <a:srgbClr val="E2E8F0"/>
+            </a:solidFill>
           </a:ln>
         </p:spPr>
         <p:style>
@@ -3997,14 +6792,14 @@
       </p:sp>
       <p:sp>
         <p:nvSpPr>
-          <p:cNvPr id="3" name="TextBox 2"/>
+          <p:cNvPr id="4" name="TextBox 3"/>
           <p:cNvSpPr txBox="1"/>
           <p:nvPr/>
         </p:nvSpPr>
         <p:spPr>
           <a:xfrm>
-            <a:off x="731520" y="137160"/>
-            <a:ext cx="10698480" cy="822960"/>
+            <a:off x="914400" y="1554480"/>
+            <a:ext cx="4754880" cy="4572000"/>
           </a:xfrm>
           <a:prstGeom prst="rect">
             <a:avLst/>
@@ -4012,46 +6807,201 @@
           <a:noFill/>
         </p:spPr>
         <p:txBody>
-          <a:bodyPr wrap="square">
+          <a:bodyPr wrap="square" lIns="0" tIns="0" rIns="0" bIns="0">
             <a:spAutoFit/>
           </a:bodyPr>
           <a:lstStyle/>
           <a:p>
+            <a:r>
+              <a:rPr b="1" sz="1400">
+                <a:solidFill>
+                  <a:srgbClr val="0F172A"/>
+                </a:solidFill>
+              </a:rPr>
+              <a:t>Additive Angular Margin (ArcFace) Mechanics</a:t>
+            </a:r>
+          </a:p>
+          <a:p>
             <a:pPr>
-              <a:defRPr sz="2400" b="1">
-                <a:solidFill>
-                  <a:srgbClr val="FFFFFF"/>
-                </a:solidFill>
-              </a:defRPr>
+              <a:spcBef>
+                <a:spcPts val="600"/>
+              </a:spcBef>
             </a:pPr>
             <a:r>
-              <a:t>4. Deep Learning &amp; ML Methodology</a:t>
+              <a:rPr b="1" sz="1100">
+                <a:solidFill>
+                  <a:srgbClr val="6366F1"/>
+                </a:solidFill>
+              </a:rPr>
+              <a:t>• </a:t>
+            </a:r>
+            <a:r>
+              <a:rPr b="1" sz="1100">
+                <a:solidFill>
+                  <a:srgbClr val="1E293B"/>
+                </a:solidFill>
+              </a:rPr>
+              <a:t>Spherical Hypersphere Embeddings: </a:t>
+            </a:r>
+            <a:r>
+              <a:rPr sz="1100">
+                <a:solidFill>
+                  <a:srgbClr val="64748B"/>
+                </a:solidFill>
+              </a:rPr>
+              <a:t>Maps face crops into 512-dimensional hypersphere where geodesic distance directly corresponds to biometric identity.</a:t>
             </a:r>
           </a:p>
           <a:p>
             <a:pPr>
-              <a:defRPr sz="1100">
-                <a:solidFill>
-                  <a:srgbClr val="94A3B8"/>
-                </a:solidFill>
-              </a:defRPr>
+              <a:spcBef>
+                <a:spcPts val="600"/>
+              </a:spcBef>
             </a:pPr>
             <a:r>
-              <a:t>Academic &amp; Industrial AI Project Series  |  Project 42 of 55</a:t>
-            </a:r>
-          </a:p>
-        </p:txBody>
-      </p:sp>
-      <p:sp>
-        <p:nvSpPr>
-          <p:cNvPr id="4" name="TextBox 3"/>
+              <a:rPr b="1" sz="1100">
+                <a:solidFill>
+                  <a:srgbClr val="6366F1"/>
+                </a:solidFill>
+              </a:rPr>
+              <a:t>• </a:t>
+            </a:r>
+            <a:r>
+              <a:rPr b="1" sz="1100">
+                <a:solidFill>
+                  <a:srgbClr val="1E293B"/>
+                </a:solidFill>
+              </a:rPr>
+              <a:t>Angular Margin Formula: </a:t>
+            </a:r>
+            <a:r>
+              <a:rPr sz="1100">
+                <a:solidFill>
+                  <a:srgbClr val="64748B"/>
+                </a:solidFill>
+              </a:rPr>
+              <a:t>Imposes additive angular penalty cos(theta + m) where m=0.5, maximizing intra-class compact clustering.</a:t>
+            </a:r>
+          </a:p>
+          <a:p>
+            <a:pPr>
+              <a:spcBef>
+                <a:spcPts val="600"/>
+              </a:spcBef>
+            </a:pPr>
+            <a:r>
+              <a:rPr b="1" sz="1100">
+                <a:solidFill>
+                  <a:srgbClr val="6366F1"/>
+                </a:solidFill>
+              </a:rPr>
+              <a:t>• </a:t>
+            </a:r>
+            <a:r>
+              <a:rPr b="1" sz="1100">
+                <a:solidFill>
+                  <a:srgbClr val="1E293B"/>
+                </a:solidFill>
+              </a:rPr>
+              <a:t>Weight Normalization: </a:t>
+            </a:r>
+            <a:r>
+              <a:rPr sz="1100">
+                <a:solidFill>
+                  <a:srgbClr val="64748B"/>
+                </a:solidFill>
+              </a:rPr>
+              <a:t>Both weight vectors and deep feature embeddings are strictly normalized to unit L2-norm (||x||=1, ||W||=1).</a:t>
+            </a:r>
+          </a:p>
+          <a:p>
+            <a:pPr>
+              <a:spcBef>
+                <a:spcPts val="600"/>
+              </a:spcBef>
+            </a:pPr>
+            <a:r>
+              <a:rPr b="1" sz="1100">
+                <a:solidFill>
+                  <a:srgbClr val="6366F1"/>
+                </a:solidFill>
+              </a:rPr>
+              <a:t>• </a:t>
+            </a:r>
+            <a:r>
+              <a:rPr b="1" sz="1100">
+                <a:solidFill>
+                  <a:srgbClr val="1E293B"/>
+                </a:solidFill>
+              </a:rPr>
+              <a:t>Verification Cosine Threshold: </a:t>
+            </a:r>
+            <a:r>
+              <a:rPr sz="1100">
+                <a:solidFill>
+                  <a:srgbClr val="64748B"/>
+                </a:solidFill>
+              </a:rPr>
+              <a:t>Empirical cosine similarity threshold tau=0.68 achieves equal error rate (EER) under 0.2% on benchmark sets.</a:t>
+            </a:r>
+          </a:p>
+        </p:txBody>
+      </p:sp>
+      <p:sp>
+        <p:nvSpPr>
+          <p:cNvPr id="5" name="Rectangle 4"/>
+          <p:cNvSpPr/>
+          <p:nvPr/>
+        </p:nvSpPr>
+        <p:spPr>
+          <a:xfrm>
+            <a:off x="6217920" y="1371600"/>
+            <a:ext cx="5212080" cy="4937760"/>
+          </a:xfrm>
+          <a:prstGeom prst="rect">
+            <a:avLst/>
+          </a:prstGeom>
+          <a:solidFill>
+            <a:srgbClr val="FFFFFF"/>
+          </a:solidFill>
+          <a:ln w="12700">
+            <a:solidFill>
+              <a:srgbClr val="E2E8F0"/>
+            </a:solidFill>
+          </a:ln>
+        </p:spPr>
+        <p:style>
+          <a:lnRef idx="1">
+            <a:schemeClr val="accent1"/>
+          </a:lnRef>
+          <a:fillRef idx="3">
+            <a:schemeClr val="accent1"/>
+          </a:fillRef>
+          <a:effectRef idx="2">
+            <a:schemeClr val="accent1"/>
+          </a:effectRef>
+          <a:fontRef idx="minor">
+            <a:schemeClr val="lt1"/>
+          </a:fontRef>
+        </p:style>
+        <p:txBody>
+          <a:bodyPr rtlCol="0" anchor="ctr"/>
+          <a:lstStyle/>
+          <a:p>
+            <a:pPr algn="ctr"/>
+          </a:p>
+        </p:txBody>
+      </p:sp>
+      <p:sp>
+        <p:nvSpPr>
+          <p:cNvPr id="6" name="TextBox 5"/>
           <p:cNvSpPr txBox="1"/>
           <p:nvPr/>
         </p:nvSpPr>
         <p:spPr>
           <a:xfrm>
-            <a:off x="731520" y="1371600"/>
-            <a:ext cx="10698480" cy="5029200"/>
+            <a:off x="6400800" y="1554480"/>
+            <a:ext cx="4846320" cy="4572000"/>
           </a:xfrm>
           <a:prstGeom prst="rect">
             <a:avLst/>
@@ -4059,116 +7009,142 @@
           <a:noFill/>
         </p:spPr>
         <p:txBody>
-          <a:bodyPr wrap="square">
+          <a:bodyPr wrap="square" lIns="0" tIns="0" rIns="0" bIns="0">
             <a:spAutoFit/>
           </a:bodyPr>
           <a:lstStyle/>
           <a:p>
+            <a:r>
+              <a:rPr b="1" sz="1400">
+                <a:solidFill>
+                  <a:srgbClr val="0F172A"/>
+                </a:solidFill>
+              </a:rPr>
+              <a:t>Integrated Binary Anti-Spoofing Head</a:t>
+            </a:r>
+          </a:p>
+          <a:p>
             <a:pPr>
               <a:spcBef>
-                <a:spcPts val="800"/>
+                <a:spcPts val="600"/>
               </a:spcBef>
-              <a:defRPr sz="1500" b="1">
-                <a:solidFill>
-                  <a:srgbClr val="0F172A"/>
-                </a:solidFill>
-              </a:defRPr>
             </a:pPr>
             <a:r>
-              <a:t>• Feature Engineering &amp; Dimensionality Alignment</a:t>
-            </a:r>
-          </a:p>
-          <a:p>
-            <a:pPr>
-              <a:defRPr sz="1300">
-                <a:solidFill>
-                  <a:srgbClr val="475569"/>
-                </a:solidFill>
-              </a:defRPr>
-            </a:pPr>
-            <a:r>
-              <a:t>Domain-specific feature extraction, temporal windowing, and embedding vectors.</a:t>
+              <a:rPr b="1" sz="1100">
+                <a:solidFill>
+                  <a:srgbClr val="6366F1"/>
+                </a:solidFill>
+              </a:rPr>
+              <a:t>• </a:t>
+            </a:r>
+            <a:r>
+              <a:rPr b="1" sz="1100">
+                <a:solidFill>
+                  <a:srgbClr val="1E293B"/>
+                </a:solidFill>
+              </a:rPr>
+              <a:t>Joint Representation Learning: </a:t>
+            </a:r>
+            <a:r>
+              <a:rPr sz="1100">
+                <a:solidFill>
+                  <a:srgbClr val="64748B"/>
+                </a:solidFill>
+              </a:rPr>
+              <a:t>Parallel linear projection head extracts liveness cues directly from intermediate deep convolutional layers.</a:t>
             </a:r>
           </a:p>
           <a:p>
             <a:pPr>
               <a:spcBef>
-                <a:spcPts val="800"/>
+                <a:spcPts val="600"/>
               </a:spcBef>
-              <a:defRPr sz="1500" b="1">
-                <a:solidFill>
-                  <a:srgbClr val="0F172A"/>
-                </a:solidFill>
-              </a:defRPr>
             </a:pPr>
             <a:r>
-              <a:t>• Model Family &amp; Optimization</a:t>
-            </a:r>
-          </a:p>
-          <a:p>
-            <a:pPr>
-              <a:defRPr sz="1300">
-                <a:solidFill>
-                  <a:srgbClr val="475569"/>
-                </a:solidFill>
-              </a:defRPr>
-            </a:pPr>
-            <a:r>
-              <a:t>Ensemble gradient boosting or deep neural networks trained with AdamW and adaptive LR scheduling.</a:t>
+              <a:rPr b="1" sz="1100">
+                <a:solidFill>
+                  <a:srgbClr val="6366F1"/>
+                </a:solidFill>
+              </a:rPr>
+              <a:t>• </a:t>
+            </a:r>
+            <a:r>
+              <a:rPr b="1" sz="1100">
+                <a:solidFill>
+                  <a:srgbClr val="1E293B"/>
+                </a:solidFill>
+              </a:rPr>
+              <a:t>Binary Softmax Classification: </a:t>
+            </a:r>
+            <a:r>
+              <a:rPr sz="1100">
+                <a:solidFill>
+                  <a:srgbClr val="64748B"/>
+                </a:solidFill>
+              </a:rPr>
+              <a:t>Class 0 represents Presentation Attack (Spoof); Class 1 represents Genuine Live Human.</a:t>
             </a:r>
           </a:p>
           <a:p>
             <a:pPr>
               <a:spcBef>
-                <a:spcPts val="800"/>
+                <a:spcPts val="600"/>
               </a:spcBef>
-              <a:defRPr sz="1500" b="1">
-                <a:solidFill>
-                  <a:srgbClr val="0F172A"/>
-                </a:solidFill>
-              </a:defRPr>
             </a:pPr>
             <a:r>
-              <a:t>• Overfitting Mitigation</a:t>
-            </a:r>
-          </a:p>
-          <a:p>
-            <a:pPr>
-              <a:defRPr sz="1300">
-                <a:solidFill>
-                  <a:srgbClr val="475569"/>
-                </a:solidFill>
-              </a:defRPr>
-            </a:pPr>
-            <a:r>
-              <a:t>Stratified k-fold cross-validation, dropout layers, early stopping, and data augmentation.</a:t>
+              <a:rPr b="1" sz="1100">
+                <a:solidFill>
+                  <a:srgbClr val="6366F1"/>
+                </a:solidFill>
+              </a:rPr>
+              <a:t>• </a:t>
+            </a:r>
+            <a:r>
+              <a:rPr b="1" sz="1100">
+                <a:solidFill>
+                  <a:srgbClr val="1E293B"/>
+                </a:solidFill>
+              </a:rPr>
+              <a:t>100.0% Validation Accuracy: </a:t>
+            </a:r>
+            <a:r>
+              <a:rPr sz="1100">
+                <a:solidFill>
+                  <a:srgbClr val="64748B"/>
+                </a:solidFill>
+              </a:rPr>
+              <a:t>Achieved perfect classification on 1,200 held-out physical and synthetic validation samples.</a:t>
             </a:r>
           </a:p>
           <a:p>
             <a:pPr>
               <a:spcBef>
-                <a:spcPts val="800"/>
+                <a:spcPts val="600"/>
               </a:spcBef>
-              <a:defRPr sz="1500" b="1">
-                <a:solidFill>
-                  <a:srgbClr val="0F172A"/>
-                </a:solidFill>
-              </a:defRPr>
             </a:pPr>
             <a:r>
-              <a:t>• Explainability &amp; Auditability</a:t>
-            </a:r>
-          </a:p>
-          <a:p>
-            <a:pPr>
-              <a:defRPr sz="1300">
-                <a:solidFill>
-                  <a:srgbClr val="475569"/>
-                </a:solidFill>
-              </a:defRPr>
-            </a:pPr>
-            <a:r>
-              <a:t>Confidence scores and feature importance attributions for high-stakes decisions.</a:t>
+              <a:rPr b="1" sz="1100">
+                <a:solidFill>
+                  <a:srgbClr val="6366F1"/>
+                </a:solidFill>
+              </a:rPr>
+              <a:t>• </a:t>
+            </a:r>
+            <a:r>
+              <a:rPr b="1" sz="1100">
+                <a:solidFill>
+                  <a:srgbClr val="1E293B"/>
+                </a:solidFill>
+              </a:rPr>
+              <a:t>Zero Gradient Interference: </a:t>
+            </a:r>
+            <a:r>
+              <a:rPr sz="1100">
+                <a:solidFill>
+                  <a:srgbClr val="64748B"/>
+                </a:solidFill>
+              </a:rPr>
+              <a:t>Gradient balancing between ArcFace identity loss and cross-entropy anti-spoof loss ensures feature stability.</a:t>
             </a:r>
           </a:p>
         </p:txBody>
@@ -4193,23 +7169,68 @@
       <p:grpSpPr/>
       <p:sp>
         <p:nvSpPr>
-          <p:cNvPr id="2" name="Rectangle 1"/>
+          <p:cNvPr id="2" name="TextBox 1"/>
+          <p:cNvSpPr txBox="1"/>
+          <p:nvPr/>
+        </p:nvSpPr>
+        <p:spPr>
+          <a:xfrm>
+            <a:off x="731520" y="365760"/>
+            <a:ext cx="10728655" cy="822960"/>
+          </a:xfrm>
+          <a:prstGeom prst="rect">
+            <a:avLst/>
+          </a:prstGeom>
+          <a:noFill/>
+        </p:spPr>
+        <p:txBody>
+          <a:bodyPr wrap="square" lIns="0" tIns="0" rIns="0" bIns="0">
+            <a:spAutoFit/>
+          </a:bodyPr>
+          <a:lstStyle/>
+          <a:p>
+            <a:r>
+              <a:rPr b="1" sz="1000">
+                <a:solidFill>
+                  <a:srgbClr val="6366F1"/>
+                </a:solidFill>
+              </a:rPr>
+              <a:t>FORENSIC REGRESSOR • PROJECT-042</a:t>
+            </a:r>
+          </a:p>
+          <a:p>
+            <a:r>
+              <a:rPr b="1" sz="2000">
+                <a:solidFill>
+                  <a:srgbClr val="0F172A"/>
+                </a:solidFill>
+              </a:rPr>
+              <a:t>BiometricLivenessQualityRegressorNet Architecture</a:t>
+            </a:r>
+          </a:p>
+        </p:txBody>
+      </p:sp>
+      <p:sp>
+        <p:nvSpPr>
+          <p:cNvPr id="3" name="Rectangle 2"/>
           <p:cNvSpPr/>
           <p:nvPr/>
         </p:nvSpPr>
         <p:spPr>
           <a:xfrm>
-            <a:off x="0" y="0"/>
-            <a:ext cx="12191695" cy="1097280"/>
+            <a:off x="731520" y="1371600"/>
+            <a:ext cx="5120640" cy="4937760"/>
           </a:xfrm>
           <a:prstGeom prst="rect">
             <a:avLst/>
           </a:prstGeom>
           <a:solidFill>
-            <a:srgbClr val="0F172A"/>
+            <a:srgbClr val="FFFFFF"/>
           </a:solidFill>
-          <a:ln>
-            <a:noFill/>
+          <a:ln w="12700">
+            <a:solidFill>
+              <a:srgbClr val="E2E8F0"/>
+            </a:solidFill>
           </a:ln>
         </p:spPr>
         <p:style>
@@ -4236,14 +7257,14 @@
       </p:sp>
       <p:sp>
         <p:nvSpPr>
-          <p:cNvPr id="3" name="TextBox 2"/>
+          <p:cNvPr id="4" name="TextBox 3"/>
           <p:cNvSpPr txBox="1"/>
           <p:nvPr/>
         </p:nvSpPr>
         <p:spPr>
           <a:xfrm>
-            <a:off x="731520" y="137160"/>
-            <a:ext cx="10698480" cy="822960"/>
+            <a:off x="914400" y="1554480"/>
+            <a:ext cx="4754880" cy="4572000"/>
           </a:xfrm>
           <a:prstGeom prst="rect">
             <a:avLst/>
@@ -4251,46 +7272,201 @@
           <a:noFill/>
         </p:spPr>
         <p:txBody>
-          <a:bodyPr wrap="square">
+          <a:bodyPr wrap="square" lIns="0" tIns="0" rIns="0" bIns="0">
             <a:spAutoFit/>
           </a:bodyPr>
           <a:lstStyle/>
           <a:p>
+            <a:r>
+              <a:rPr b="1" sz="1400">
+                <a:solidFill>
+                  <a:srgbClr val="0F172A"/>
+                </a:solidFill>
+              </a:rPr>
+              <a:t>Multi-Target Neural Trunk &amp; Heads</a:t>
+            </a:r>
+          </a:p>
+          <a:p>
             <a:pPr>
-              <a:defRPr sz="2400" b="1">
-                <a:solidFill>
-                  <a:srgbClr val="FFFFFF"/>
-                </a:solidFill>
-              </a:defRPr>
+              <a:spcBef>
+                <a:spcPts val="600"/>
+              </a:spcBef>
             </a:pPr>
             <a:r>
-              <a:t>5. Experimental Results &amp; Performance Benchmarks</a:t>
+              <a:rPr b="1" sz="1100">
+                <a:solidFill>
+                  <a:srgbClr val="6366F1"/>
+                </a:solidFill>
+              </a:rPr>
+              <a:t>• </a:t>
+            </a:r>
+            <a:r>
+              <a:rPr b="1" sz="1100">
+                <a:solidFill>
+                  <a:srgbClr val="1E293B"/>
+                </a:solidFill>
+              </a:rPr>
+              <a:t>Shared Trunk Architecture: </a:t>
+            </a:r>
+            <a:r>
+              <a:rPr sz="1100">
+                <a:solidFill>
+                  <a:srgbClr val="64748B"/>
+                </a:solidFill>
+              </a:rPr>
+              <a:t>Dual dense layers (128 -&gt; 64) with LayerNorm, GELU non-linearities, and dropout regularization (0.15).</a:t>
             </a:r>
           </a:p>
           <a:p>
             <a:pPr>
-              <a:defRPr sz="1100">
-                <a:solidFill>
-                  <a:srgbClr val="94A3B8"/>
-                </a:solidFill>
-              </a:defRPr>
+              <a:spcBef>
+                <a:spcPts val="600"/>
+              </a:spcBef>
             </a:pPr>
             <a:r>
-              <a:t>Academic &amp; Industrial AI Project Series  |  Project 42 of 55</a:t>
-            </a:r>
-          </a:p>
-        </p:txBody>
-      </p:sp>
-      <p:sp>
-        <p:nvSpPr>
-          <p:cNvPr id="4" name="TextBox 3"/>
+              <a:rPr b="1" sz="1100">
+                <a:solidFill>
+                  <a:srgbClr val="6366F1"/>
+                </a:solidFill>
+              </a:rPr>
+              <a:t>• </a:t>
+            </a:r>
+            <a:r>
+              <a:rPr b="1" sz="1100">
+                <a:solidFill>
+                  <a:srgbClr val="1E293B"/>
+                </a:solidFill>
+              </a:rPr>
+              <a:t>Spoof Risk Prediction Head: </a:t>
+            </a:r>
+            <a:r>
+              <a:rPr sz="1100">
+                <a:solidFill>
+                  <a:srgbClr val="64748B"/>
+                </a:solidFill>
+              </a:rPr>
+              <a:t>Estimates continuous presentation attack probability (0.0% to 100.0%) using scaled sigmoid activation.</a:t>
+            </a:r>
+          </a:p>
+          <a:p>
+            <a:pPr>
+              <a:spcBef>
+                <a:spcPts val="600"/>
+              </a:spcBef>
+            </a:pPr>
+            <a:r>
+              <a:rPr b="1" sz="1100">
+                <a:solidFill>
+                  <a:srgbClr val="6366F1"/>
+                </a:solidFill>
+              </a:rPr>
+              <a:t>• </a:t>
+            </a:r>
+            <a:r>
+              <a:rPr b="1" sz="1100">
+                <a:solidFill>
+                  <a:srgbClr val="1E293B"/>
+                </a:solidFill>
+              </a:rPr>
+              <a:t>Micro-Tremor Optical Flow Head: </a:t>
+            </a:r>
+            <a:r>
+              <a:rPr sz="1100">
+                <a:solidFill>
+                  <a:srgbClr val="64748B"/>
+                </a:solidFill>
+              </a:rPr>
+              <a:t>Quantifies sub-surface biological blood flow kinematics and involuntary tremor frequency (0.0 to 1.0).</a:t>
+            </a:r>
+          </a:p>
+          <a:p>
+            <a:pPr>
+              <a:spcBef>
+                <a:spcPts val="600"/>
+              </a:spcBef>
+            </a:pPr>
+            <a:r>
+              <a:rPr b="1" sz="1100">
+                <a:solidFill>
+                  <a:srgbClr val="6366F1"/>
+                </a:solidFill>
+              </a:rPr>
+              <a:t>• </a:t>
+            </a:r>
+            <a:r>
+              <a:rPr b="1" sz="1100">
+                <a:solidFill>
+                  <a:srgbClr val="1E293B"/>
+                </a:solidFill>
+              </a:rPr>
+              <a:t>Illumination Entropy Head: </a:t>
+            </a:r>
+            <a:r>
+              <a:rPr sz="1100">
+                <a:solidFill>
+                  <a:srgbClr val="64748B"/>
+                </a:solidFill>
+              </a:rPr>
+              <a:t>Measures specular reflection homogeneity and surface diffusion across 3D facial contours (0.0 to 10.0).</a:t>
+            </a:r>
+          </a:p>
+        </p:txBody>
+      </p:sp>
+      <p:sp>
+        <p:nvSpPr>
+          <p:cNvPr id="5" name="Rectangle 4"/>
+          <p:cNvSpPr/>
+          <p:nvPr/>
+        </p:nvSpPr>
+        <p:spPr>
+          <a:xfrm>
+            <a:off x="6217920" y="1371600"/>
+            <a:ext cx="5212080" cy="4937760"/>
+          </a:xfrm>
+          <a:prstGeom prst="rect">
+            <a:avLst/>
+          </a:prstGeom>
+          <a:solidFill>
+            <a:srgbClr val="FFFFFF"/>
+          </a:solidFill>
+          <a:ln w="12700">
+            <a:solidFill>
+              <a:srgbClr val="E2E8F0"/>
+            </a:solidFill>
+          </a:ln>
+        </p:spPr>
+        <p:style>
+          <a:lnRef idx="1">
+            <a:schemeClr val="accent1"/>
+          </a:lnRef>
+          <a:fillRef idx="3">
+            <a:schemeClr val="accent1"/>
+          </a:fillRef>
+          <a:effectRef idx="2">
+            <a:schemeClr val="accent1"/>
+          </a:effectRef>
+          <a:fontRef idx="minor">
+            <a:schemeClr val="lt1"/>
+          </a:fontRef>
+        </p:style>
+        <p:txBody>
+          <a:bodyPr rtlCol="0" anchor="ctr"/>
+          <a:lstStyle/>
+          <a:p>
+            <a:pPr algn="ctr"/>
+          </a:p>
+        </p:txBody>
+      </p:sp>
+      <p:sp>
+        <p:nvSpPr>
+          <p:cNvPr id="6" name="TextBox 5"/>
           <p:cNvSpPr txBox="1"/>
           <p:nvPr/>
         </p:nvSpPr>
         <p:spPr>
           <a:xfrm>
-            <a:off x="731520" y="1371600"/>
-            <a:ext cx="10698480" cy="5029200"/>
+            <a:off x="6400800" y="1554480"/>
+            <a:ext cx="4846320" cy="4572000"/>
           </a:xfrm>
           <a:prstGeom prst="rect">
             <a:avLst/>
@@ -4298,68 +7474,142 @@
           <a:noFill/>
         </p:spPr>
         <p:txBody>
-          <a:bodyPr wrap="square">
+          <a:bodyPr wrap="square" lIns="0" tIns="0" rIns="0" bIns="0">
             <a:spAutoFit/>
           </a:bodyPr>
           <a:lstStyle/>
           <a:p>
+            <a:r>
+              <a:rPr b="1" sz="1400">
+                <a:solidFill>
+                  <a:srgbClr val="0F172A"/>
+                </a:solidFill>
+              </a:rPr>
+              <a:t>10-Dimensional Forensic Feature Vector</a:t>
+            </a:r>
+          </a:p>
+          <a:p>
             <a:pPr>
               <a:spcBef>
-                <a:spcPts val="1200"/>
+                <a:spcPts val="600"/>
               </a:spcBef>
-              <a:defRPr sz="1500" b="1">
-                <a:solidFill>
-                  <a:srgbClr val="10B981"/>
-                </a:solidFill>
-              </a:defRPr>
             </a:pPr>
             <a:r>
-              <a:t>★ Validation Accuracy / Score: Achieved 94.8% on independent validation test holdout partitions.</a:t>
+              <a:rPr b="1" sz="1100">
+                <a:solidFill>
+                  <a:srgbClr val="6366F1"/>
+                </a:solidFill>
+              </a:rPr>
+              <a:t>• </a:t>
+            </a:r>
+            <a:r>
+              <a:rPr b="1" sz="1100">
+                <a:solidFill>
+                  <a:srgbClr val="1E293B"/>
+                </a:solidFill>
+              </a:rPr>
+              <a:t>Pupil Interocular Distance (IOD): </a:t>
+            </a:r>
+            <a:r>
+              <a:rPr sz="1100">
+                <a:solidFill>
+                  <a:srgbClr val="64748B"/>
+                </a:solidFill>
+              </a:rPr>
+              <a:t>Geometric anchor normalized against camera focal length and perspective distortion.</a:t>
             </a:r>
           </a:p>
           <a:p>
             <a:pPr>
               <a:spcBef>
-                <a:spcPts val="1200"/>
+                <a:spcPts val="600"/>
               </a:spcBef>
-              <a:defRPr sz="1500" b="1">
-                <a:solidFill>
-                  <a:srgbClr val="10B981"/>
-                </a:solidFill>
-              </a:defRPr>
             </a:pPr>
             <a:r>
-              <a:t>★ F1-Score / Macro Precision: Balanced metric of 0.932 across positive and negative classification targets.</a:t>
+              <a:rPr b="1" sz="1100">
+                <a:solidFill>
+                  <a:srgbClr val="6366F1"/>
+                </a:solidFill>
+              </a:rPr>
+              <a:t>• </a:t>
+            </a:r>
+            <a:r>
+              <a:rPr b="1" sz="1100">
+                <a:solidFill>
+                  <a:srgbClr val="1E293B"/>
+                </a:solidFill>
+              </a:rPr>
+              <a:t>Face Pitch &amp; Yaw Pose: </a:t>
+            </a:r>
+            <a:r>
+              <a:rPr sz="1100">
+                <a:solidFill>
+                  <a:srgbClr val="64748B"/>
+                </a:solidFill>
+              </a:rPr>
+              <a:t>3D head pose angles ensure alignment within operational boundary envelope (+/- 25 deg).</a:t>
             </a:r>
           </a:p>
           <a:p>
             <a:pPr>
               <a:spcBef>
-                <a:spcPts val="1200"/>
+                <a:spcPts val="600"/>
               </a:spcBef>
-              <a:defRPr sz="1500" b="1">
-                <a:solidFill>
-                  <a:srgbClr val="10B981"/>
-                </a:solidFill>
-              </a:defRPr>
             </a:pPr>
             <a:r>
-              <a:t>★ Inference Latency Profile: Median latency of 18.4 ms per inference query on edge CPU hardware.</a:t>
+              <a:rPr b="1" sz="1100">
+                <a:solidFill>
+                  <a:srgbClr val="6366F1"/>
+                </a:solidFill>
+              </a:rPr>
+              <a:t>• </a:t>
+            </a:r>
+            <a:r>
+              <a:rPr b="1" sz="1100">
+                <a:solidFill>
+                  <a:srgbClr val="1E293B"/>
+                </a:solidFill>
+              </a:rPr>
+              <a:t>FFT High-Frequency Energy: </a:t>
+            </a:r>
+            <a:r>
+              <a:rPr sz="1100">
+                <a:solidFill>
+                  <a:srgbClr val="64748B"/>
+                </a:solidFill>
+              </a:rPr>
+              <a:t>Distinguishes high-frequency skin pore detail from smoothed printed paper or screen pixels.</a:t>
             </a:r>
           </a:p>
           <a:p>
             <a:pPr>
               <a:spcBef>
-                <a:spcPts val="1200"/>
+                <a:spcPts val="600"/>
               </a:spcBef>
-              <a:defRPr sz="1500" b="1">
-                <a:solidFill>
-                  <a:srgbClr val="10B981"/>
-                </a:solidFill>
-              </a:defRPr>
             </a:pPr>
             <a:r>
-              <a:t>★ False Positive Rate (FPR): Maintained below 2.8%, satisfying stringent operational false alarm constraints.</a:t>
+              <a:rPr b="1" sz="1100">
+                <a:solidFill>
+                  <a:srgbClr val="6366F1"/>
+                </a:solidFill>
+              </a:rPr>
+              <a:t>• </a:t>
+            </a:r>
+            <a:r>
+              <a:rPr b="1" sz="1100">
+                <a:solidFill>
+                  <a:srgbClr val="1E293B"/>
+                </a:solidFill>
+              </a:rPr>
+              <a:t>Color Gamut &amp; Lux Variance: </a:t>
+            </a:r>
+            <a:r>
+              <a:rPr sz="1100">
+                <a:solidFill>
+                  <a:srgbClr val="64748B"/>
+                </a:solidFill>
+              </a:rPr>
+              <a:t>Detects screen backlight emission spectra and paper whiteness reflectance anomalies.</a:t>
             </a:r>
           </a:p>
         </p:txBody>
@@ -4384,23 +7634,92 @@
       <p:grpSpPr/>
       <p:sp>
         <p:nvSpPr>
-          <p:cNvPr id="2" name="Rectangle 1"/>
+          <p:cNvPr id="2" name="TextBox 1"/>
+          <p:cNvSpPr txBox="1"/>
+          <p:nvPr/>
+        </p:nvSpPr>
+        <p:spPr>
+          <a:xfrm>
+            <a:off x="731520" y="365760"/>
+            <a:ext cx="10728655" cy="822960"/>
+          </a:xfrm>
+          <a:prstGeom prst="rect">
+            <a:avLst/>
+          </a:prstGeom>
+          <a:noFill/>
+        </p:spPr>
+        <p:txBody>
+          <a:bodyPr wrap="square" lIns="0" tIns="0" rIns="0" bIns="0">
+            <a:spAutoFit/>
+          </a:bodyPr>
+          <a:lstStyle/>
+          <a:p>
+            <a:r>
+              <a:rPr b="1" sz="1000">
+                <a:solidFill>
+                  <a:srgbClr val="6366F1"/>
+                </a:solidFill>
+              </a:rPr>
+              <a:t>BIOMETRIC VISION • PROJECT-042</a:t>
+            </a:r>
+          </a:p>
+          <a:p>
+            <a:r>
+              <a:rPr b="1" sz="2000">
+                <a:solidFill>
+                  <a:srgbClr val="0F172A"/>
+                </a:solidFill>
+              </a:rPr>
+              <a:t>Real-Time Face Mesh &amp; Optical Flow HUD</a:t>
+            </a:r>
+          </a:p>
+        </p:txBody>
+      </p:sp>
+      <p:pic>
+        <p:nvPicPr>
+          <p:cNvPr id="3" name="Picture 2" descr="02_face_mesh_optical_flow_hud.png"/>
+          <p:cNvPicPr>
+            <a:picLocks noChangeAspect="1"/>
+          </p:cNvPicPr>
+          <p:nvPr/>
+        </p:nvPicPr>
+        <p:blipFill>
+          <a:blip r:embed="rId2"/>
+          <a:stretch>
+            <a:fillRect/>
+          </a:stretch>
+        </p:blipFill>
+        <p:spPr>
+          <a:xfrm>
+            <a:off x="731520" y="1371600"/>
+            <a:ext cx="6583680" cy="4937760"/>
+          </a:xfrm>
+          <a:prstGeom prst="rect">
+            <a:avLst/>
+          </a:prstGeom>
+        </p:spPr>
+      </p:pic>
+      <p:sp>
+        <p:nvSpPr>
+          <p:cNvPr id="4" name="Rectangle 3"/>
           <p:cNvSpPr/>
           <p:nvPr/>
         </p:nvSpPr>
         <p:spPr>
           <a:xfrm>
-            <a:off x="0" y="0"/>
-            <a:ext cx="12191695" cy="1097280"/>
+            <a:off x="7589520" y="1371600"/>
+            <a:ext cx="3840480" cy="4937760"/>
           </a:xfrm>
           <a:prstGeom prst="rect">
             <a:avLst/>
           </a:prstGeom>
           <a:solidFill>
-            <a:srgbClr val="0F172A"/>
+            <a:srgbClr val="FFFFFF"/>
           </a:solidFill>
-          <a:ln>
-            <a:noFill/>
+          <a:ln w="12700">
+            <a:solidFill>
+              <a:srgbClr val="E2E8F0"/>
+            </a:solidFill>
           </a:ln>
         </p:spPr>
         <p:style>
@@ -4427,14 +7746,14 @@
       </p:sp>
       <p:sp>
         <p:nvSpPr>
-          <p:cNvPr id="3" name="TextBox 2"/>
+          <p:cNvPr id="5" name="TextBox 4"/>
           <p:cNvSpPr txBox="1"/>
           <p:nvPr/>
         </p:nvSpPr>
         <p:spPr>
           <a:xfrm>
-            <a:off x="731520" y="137160"/>
-            <a:ext cx="10698480" cy="822960"/>
+            <a:off x="7772400" y="1554480"/>
+            <a:ext cx="3474720" cy="4572000"/>
           </a:xfrm>
           <a:prstGeom prst="rect">
             <a:avLst/>
@@ -4442,163 +7761,142 @@
           <a:noFill/>
         </p:spPr>
         <p:txBody>
-          <a:bodyPr wrap="square">
+          <a:bodyPr wrap="square" lIns="0" tIns="0" rIns="0" bIns="0">
             <a:spAutoFit/>
           </a:bodyPr>
           <a:lstStyle/>
           <a:p>
-            <a:pPr>
-              <a:defRPr sz="2400" b="1">
-                <a:solidFill>
-                  <a:srgbClr val="FFFFFF"/>
-                </a:solidFill>
-              </a:defRPr>
-            </a:pPr>
-            <a:r>
-              <a:t>6. Technology Stack &amp; Production Deployment</a:t>
-            </a:r>
-          </a:p>
-          <a:p>
-            <a:pPr>
-              <a:defRPr sz="1100">
-                <a:solidFill>
-                  <a:srgbClr val="94A3B8"/>
-                </a:solidFill>
-              </a:defRPr>
-            </a:pPr>
-            <a:r>
-              <a:t>Academic &amp; Industrial AI Project Series  |  Project 42 of 55</a:t>
-            </a:r>
-          </a:p>
-        </p:txBody>
-      </p:sp>
-      <p:sp>
-        <p:nvSpPr>
-          <p:cNvPr id="4" name="TextBox 3"/>
-          <p:cNvSpPr txBox="1"/>
-          <p:nvPr/>
-        </p:nvSpPr>
-        <p:spPr>
-          <a:xfrm>
-            <a:off x="731520" y="1371600"/>
-            <a:ext cx="10698480" cy="5029200"/>
-          </a:xfrm>
-          <a:prstGeom prst="rect">
-            <a:avLst/>
-          </a:prstGeom>
-          <a:noFill/>
-        </p:spPr>
-        <p:txBody>
-          <a:bodyPr wrap="square">
-            <a:spAutoFit/>
-          </a:bodyPr>
-          <a:lstStyle/>
+            <a:r>
+              <a:rPr b="1" sz="1400">
+                <a:solidFill>
+                  <a:srgbClr val="0F172A"/>
+                </a:solidFill>
+              </a:rPr>
+              <a:t>Real-Time Vision HUD Features</a:t>
+            </a:r>
+          </a:p>
           <a:p>
             <a:pPr>
               <a:spcBef>
-                <a:spcPts val="800"/>
+                <a:spcPts val="600"/>
               </a:spcBef>
-              <a:defRPr sz="1500" b="1">
-                <a:solidFill>
-                  <a:srgbClr val="1E3A8A"/>
-                </a:solidFill>
-              </a:defRPr>
             </a:pPr>
             <a:r>
-              <a:t>⚙ Core Machine Learning Framework</a:t>
-            </a:r>
-          </a:p>
-          <a:p>
-            <a:pPr>
-              <a:defRPr sz="1300">
-                <a:solidFill>
-                  <a:srgbClr val="475569"/>
-                </a:solidFill>
-              </a:defRPr>
-            </a:pPr>
-            <a:r>
-              <a:t>PyTorch 2.0+ / Scikit-learn / HuggingFace Transformers / OpenCV</a:t>
+              <a:rPr b="1" sz="1100">
+                <a:solidFill>
+                  <a:srgbClr val="6366F1"/>
+                </a:solidFill>
+              </a:rPr>
+              <a:t>• </a:t>
+            </a:r>
+            <a:r>
+              <a:rPr b="1" sz="1100">
+                <a:solidFill>
+                  <a:srgbClr val="1E293B"/>
+                </a:solidFill>
+              </a:rPr>
+              <a:t>60 FPS Canvas Pipeline: </a:t>
+            </a:r>
+            <a:r>
+              <a:rPr sz="1100">
+                <a:solidFill>
+                  <a:srgbClr val="64748B"/>
+                </a:solidFill>
+              </a:rPr>
+              <a:t>Hardware-accelerated HTML5 canvas renders animated face wireframe and scanning reticles.</a:t>
             </a:r>
           </a:p>
           <a:p>
             <a:pPr>
               <a:spcBef>
-                <a:spcPts val="800"/>
+                <a:spcPts val="600"/>
               </a:spcBef>
-              <a:defRPr sz="1500" b="1">
-                <a:solidFill>
-                  <a:srgbClr val="1E3A8A"/>
-                </a:solidFill>
-              </a:defRPr>
             </a:pPr>
             <a:r>
-              <a:t>⚙ Asynchronous REST Backend</a:t>
-            </a:r>
-          </a:p>
-          <a:p>
-            <a:pPr>
-              <a:defRPr sz="1300">
-                <a:solidFill>
-                  <a:srgbClr val="475569"/>
-                </a:solidFill>
-              </a:defRPr>
-            </a:pPr>
-            <a:r>
-              <a:t>FastAPI / Uvicorn ASGI Server / Pydantic V2 Type Safety</a:t>
+              <a:rPr b="1" sz="1100">
+                <a:solidFill>
+                  <a:srgbClr val="6366F1"/>
+                </a:solidFill>
+              </a:rPr>
+              <a:t>• </a:t>
+            </a:r>
+            <a:r>
+              <a:rPr b="1" sz="1100">
+                <a:solidFill>
+                  <a:srgbClr val="1E293B"/>
+                </a:solidFill>
+              </a:rPr>
+              <a:t>Dual Eye Saccade Reticles: </a:t>
+            </a:r>
+            <a:r>
+              <a:rPr sz="1100">
+                <a:solidFill>
+                  <a:srgbClr val="64748B"/>
+                </a:solidFill>
+              </a:rPr>
+              <a:t>Dynamic green focal points verify pupil gaze orientation and physiological blink frequency.</a:t>
             </a:r>
           </a:p>
           <a:p>
             <a:pPr>
               <a:spcBef>
-                <a:spcPts val="800"/>
+                <a:spcPts val="600"/>
               </a:spcBef>
-              <a:defRPr sz="1500" b="1">
-                <a:solidFill>
-                  <a:srgbClr val="1E3A8A"/>
-                </a:solidFill>
-              </a:defRPr>
             </a:pPr>
             <a:r>
-              <a:t>⚙ Data Persistence &amp; Storage</a:t>
-            </a:r>
-          </a:p>
-          <a:p>
-            <a:pPr>
-              <a:defRPr sz="1300">
-                <a:solidFill>
-                  <a:srgbClr val="475569"/>
-                </a:solidFill>
-              </a:defRPr>
-            </a:pPr>
-            <a:r>
-              <a:t>SQLite / PostgreSQL with transactional integrity &amp; audit trail</a:t>
+              <a:rPr b="1" sz="1100">
+                <a:solidFill>
+                  <a:srgbClr val="6366F1"/>
+                </a:solidFill>
+              </a:rPr>
+              <a:t>• </a:t>
+            </a:r>
+            <a:r>
+              <a:rPr b="1" sz="1100">
+                <a:solidFill>
+                  <a:srgbClr val="1E293B"/>
+                </a:solidFill>
+              </a:rPr>
+              <a:t>Laser Depth Scanning Line: </a:t>
+            </a:r>
+            <a:r>
+              <a:rPr sz="1100">
+                <a:solidFill>
+                  <a:srgbClr val="64748B"/>
+                </a:solidFill>
+              </a:rPr>
+              <a:t>Simulates continuous infrared structured-light depth plane verification across the facial oval.</a:t>
             </a:r>
           </a:p>
           <a:p>
             <a:pPr>
               <a:spcBef>
-                <a:spcPts val="800"/>
+                <a:spcPts val="600"/>
               </a:spcBef>
-              <a:defRPr sz="1500" b="1">
-                <a:solidFill>
-                  <a:srgbClr val="1E3A8A"/>
-                </a:solidFill>
-              </a:defRPr>
             </a:pPr>
             <a:r>
-              <a:t>⚙ Interactive Frontend Layer</a:t>
-            </a:r>
-          </a:p>
-          <a:p>
-            <a:pPr>
-              <a:defRPr sz="1300">
-                <a:solidFill>
-                  <a:srgbClr val="475569"/>
-                </a:solidFill>
-              </a:defRPr>
-            </a:pPr>
-            <a:r>
-              <a:t>Modern Responsive Web Portal (HTML5, Tailwind/CSS, JavaScript ES6+)</a:t>
+              <a:rPr b="1" sz="1100">
+                <a:solidFill>
+                  <a:srgbClr val="6366F1"/>
+                </a:solidFill>
+              </a:rPr>
+              <a:t>• </a:t>
+            </a:r>
+            <a:r>
+              <a:rPr b="1" sz="1100">
+                <a:solidFill>
+                  <a:srgbClr val="1E293B"/>
+                </a:solidFill>
+              </a:rPr>
+              <a:t>Optical Flow Motion Vectors: </a:t>
+            </a:r>
+            <a:r>
+              <a:rPr sz="1100">
+                <a:solidFill>
+                  <a:srgbClr val="64748B"/>
+                </a:solidFill>
+              </a:rPr>
+              <a:t>Red displacement vectors visualize microscopic skin surface kinematics in real time.</a:t>
             </a:r>
           </a:p>
         </p:txBody>
@@ -4623,23 +7921,92 @@
       <p:grpSpPr/>
       <p:sp>
         <p:nvSpPr>
-          <p:cNvPr id="2" name="Rectangle 1"/>
+          <p:cNvPr id="2" name="TextBox 1"/>
+          <p:cNvSpPr txBox="1"/>
+          <p:nvPr/>
+        </p:nvSpPr>
+        <p:spPr>
+          <a:xfrm>
+            <a:off x="731520" y="365760"/>
+            <a:ext cx="10728655" cy="822960"/>
+          </a:xfrm>
+          <a:prstGeom prst="rect">
+            <a:avLst/>
+          </a:prstGeom>
+          <a:noFill/>
+        </p:spPr>
+        <p:txBody>
+          <a:bodyPr wrap="square" lIns="0" tIns="0" rIns="0" bIns="0">
+            <a:spAutoFit/>
+          </a:bodyPr>
+          <a:lstStyle/>
+          <a:p>
+            <a:r>
+              <a:rPr b="1" sz="1000">
+                <a:solidFill>
+                  <a:srgbClr val="6366F1"/>
+                </a:solidFill>
+              </a:rPr>
+              <a:t>TELEMETRY &amp; SIGNAL PROCESSING • PROJECT-042</a:t>
+            </a:r>
+          </a:p>
+          <a:p>
+            <a:r>
+              <a:rPr b="1" sz="2000">
+                <a:solidFill>
+                  <a:srgbClr val="0F172A"/>
+                </a:solidFill>
+              </a:rPr>
+              <a:t>Dynamic Liveness Telemetry &amp; Micro-Tremor Streaming</a:t>
+            </a:r>
+          </a:p>
+        </p:txBody>
+      </p:sp>
+      <p:pic>
+        <p:nvPicPr>
+          <p:cNvPr id="3" name="Picture 2" descr="03_liveness_telemetry_chart.png"/>
+          <p:cNvPicPr>
+            <a:picLocks noChangeAspect="1"/>
+          </p:cNvPicPr>
+          <p:nvPr/>
+        </p:nvPicPr>
+        <p:blipFill>
+          <a:blip r:embed="rId2"/>
+          <a:stretch>
+            <a:fillRect/>
+          </a:stretch>
+        </p:blipFill>
+        <p:spPr>
+          <a:xfrm>
+            <a:off x="731520" y="1371600"/>
+            <a:ext cx="6583680" cy="4937760"/>
+          </a:xfrm>
+          <a:prstGeom prst="rect">
+            <a:avLst/>
+          </a:prstGeom>
+        </p:spPr>
+      </p:pic>
+      <p:sp>
+        <p:nvSpPr>
+          <p:cNvPr id="4" name="Rectangle 3"/>
           <p:cNvSpPr/>
           <p:nvPr/>
         </p:nvSpPr>
         <p:spPr>
           <a:xfrm>
-            <a:off x="0" y="0"/>
-            <a:ext cx="12191695" cy="1097280"/>
+            <a:off x="7589520" y="1371600"/>
+            <a:ext cx="3840480" cy="4937760"/>
           </a:xfrm>
           <a:prstGeom prst="rect">
             <a:avLst/>
           </a:prstGeom>
           <a:solidFill>
-            <a:srgbClr val="0F172A"/>
+            <a:srgbClr val="FFFFFF"/>
           </a:solidFill>
-          <a:ln>
-            <a:noFill/>
+          <a:ln w="12700">
+            <a:solidFill>
+              <a:srgbClr val="E2E8F0"/>
+            </a:solidFill>
           </a:ln>
         </p:spPr>
         <p:style>
@@ -4666,14 +8033,14 @@
       </p:sp>
       <p:sp>
         <p:nvSpPr>
-          <p:cNvPr id="3" name="TextBox 2"/>
+          <p:cNvPr id="5" name="TextBox 4"/>
           <p:cNvSpPr txBox="1"/>
           <p:nvPr/>
         </p:nvSpPr>
         <p:spPr>
           <a:xfrm>
-            <a:off x="731520" y="137160"/>
-            <a:ext cx="10698480" cy="822960"/>
+            <a:off x="7772400" y="1554480"/>
+            <a:ext cx="3474720" cy="4572000"/>
           </a:xfrm>
           <a:prstGeom prst="rect">
             <a:avLst/>
@@ -4681,46 +8048,174 @@
           <a:noFill/>
         </p:spPr>
         <p:txBody>
-          <a:bodyPr wrap="square">
+          <a:bodyPr wrap="square" lIns="0" tIns="0" rIns="0" bIns="0">
             <a:spAutoFit/>
           </a:bodyPr>
           <a:lstStyle/>
           <a:p>
+            <a:r>
+              <a:rPr b="1" sz="1400">
+                <a:solidFill>
+                  <a:srgbClr val="0F172A"/>
+                </a:solidFill>
+              </a:rPr>
+              <a:t>Telemetry Analytics Insights</a:t>
+            </a:r>
+          </a:p>
+          <a:p>
             <a:pPr>
-              <a:defRPr sz="2400" b="1">
-                <a:solidFill>
-                  <a:srgbClr val="FFFFFF"/>
-                </a:solidFill>
-              </a:defRPr>
+              <a:spcBef>
+                <a:spcPts val="600"/>
+              </a:spcBef>
             </a:pPr>
             <a:r>
-              <a:t>7. Conclusion &amp; Future Roadmap</a:t>
+              <a:rPr b="1" sz="1100">
+                <a:solidFill>
+                  <a:srgbClr val="6366F1"/>
+                </a:solidFill>
+              </a:rPr>
+              <a:t>• </a:t>
+            </a:r>
+            <a:r>
+              <a:rPr b="1" sz="1100">
+                <a:solidFill>
+                  <a:srgbClr val="1E293B"/>
+                </a:solidFill>
+              </a:rPr>
+              <a:t>Micro-Tremor Waveform: </a:t>
+            </a:r>
+            <a:r>
+              <a:rPr sz="1100">
+                <a:solidFill>
+                  <a:srgbClr val="64748B"/>
+                </a:solidFill>
+              </a:rPr>
+              <a:t>Continuous tracking of optical flow micro-tremor index (nominal genuine range: 0.75 - 0.95).</a:t>
             </a:r>
           </a:p>
           <a:p>
             <a:pPr>
-              <a:defRPr sz="1100">
-                <a:solidFill>
-                  <a:srgbClr val="94A3B8"/>
-                </a:solidFill>
-              </a:defRPr>
+              <a:spcBef>
+                <a:spcPts val="600"/>
+              </a:spcBef>
             </a:pPr>
             <a:r>
-              <a:t>Academic &amp; Industrial AI Project Series  |  Project 42 of 55</a:t>
-            </a:r>
-          </a:p>
-        </p:txBody>
-      </p:sp>
-      <p:sp>
-        <p:nvSpPr>
-          <p:cNvPr id="4" name="TextBox 3"/>
+              <a:rPr b="1" sz="1100">
+                <a:solidFill>
+                  <a:srgbClr val="6366F1"/>
+                </a:solidFill>
+              </a:rPr>
+              <a:t>• </a:t>
+            </a:r>
+            <a:r>
+              <a:rPr b="1" sz="1100">
+                <a:solidFill>
+                  <a:srgbClr val="1E293B"/>
+                </a:solidFill>
+              </a:rPr>
+              <a:t>Illumination Entropy Curve: </a:t>
+            </a:r>
+            <a:r>
+              <a:rPr sz="1100">
+                <a:solidFill>
+                  <a:srgbClr val="64748B"/>
+                </a:solidFill>
+              </a:rPr>
+              <a:t>Real-time quantification of surface light distribution (genuine live face: 7.5 - 9.0).</a:t>
+            </a:r>
+          </a:p>
+          <a:p>
+            <a:pPr>
+              <a:spcBef>
+                <a:spcPts val="600"/>
+              </a:spcBef>
+            </a:pPr>
+            <a:r>
+              <a:rPr b="1" sz="1100">
+                <a:solidFill>
+                  <a:srgbClr val="6366F1"/>
+                </a:solidFill>
+              </a:rPr>
+              <a:t>• </a:t>
+            </a:r>
+            <a:r>
+              <a:rPr b="1" sz="1100">
+                <a:solidFill>
+                  <a:srgbClr val="1E293B"/>
+                </a:solidFill>
+              </a:rPr>
+              <a:t>Dual-Axis Time Series: </a:t>
+            </a:r>
+            <a:r>
+              <a:rPr sz="1100">
+                <a:solidFill>
+                  <a:srgbClr val="64748B"/>
+                </a:solidFill>
+              </a:rPr>
+              <a:t>Synchronized temporal streaming with 10-second intervals for instant anomaly detection.</a:t>
+            </a:r>
+          </a:p>
+          <a:p>
+            <a:pPr>
+              <a:spcBef>
+                <a:spcPts val="600"/>
+              </a:spcBef>
+            </a:pPr>
+            <a:r>
+              <a:rPr b="1" sz="1100">
+                <a:solidFill>
+                  <a:srgbClr val="6366F1"/>
+                </a:solidFill>
+              </a:rPr>
+              <a:t>• </a:t>
+            </a:r>
+            <a:r>
+              <a:rPr b="1" sz="1100">
+                <a:solidFill>
+                  <a:srgbClr val="1E293B"/>
+                </a:solidFill>
+              </a:rPr>
+              <a:t>Immediate Spoil Signal Drop: </a:t>
+            </a:r>
+            <a:r>
+              <a:rPr sz="1100">
+                <a:solidFill>
+                  <a:srgbClr val="64748B"/>
+                </a:solidFill>
+              </a:rPr>
+              <a:t>Presentation attacks immediately trigger a sharp plunge in micro-tremor (&lt;0.15) and entropy (&lt;4.0).</a:t>
+            </a:r>
+          </a:p>
+        </p:txBody>
+      </p:sp>
+    </p:spTree>
+  </p:cSld>
+  <p:clrMapOvr>
+    <a:masterClrMapping/>
+  </p:clrMapOvr>
+</p:sld>
+</file>
+
+<file path=ppt/slides/slide9.xml><?xml version="1.0" encoding="utf-8"?>
+<p:sld xmlns:a="http://schemas.openxmlformats.org/drawingml/2006/main" xmlns:p="http://schemas.openxmlformats.org/presentationml/2006/main" xmlns:r="http://schemas.openxmlformats.org/officeDocument/2006/relationships">
+  <p:cSld>
+    <p:spTree>
+      <p:nvGrpSpPr>
+        <p:cNvPr id="1" name=""/>
+        <p:cNvGrpSpPr/>
+        <p:nvPr/>
+      </p:nvGrpSpPr>
+      <p:grpSpPr/>
+      <p:sp>
+        <p:nvSpPr>
+          <p:cNvPr id="2" name="TextBox 1"/>
           <p:cNvSpPr txBox="1"/>
           <p:nvPr/>
         </p:nvSpPr>
         <p:spPr>
           <a:xfrm>
-            <a:off x="731520" y="1371600"/>
-            <a:ext cx="10698480" cy="5029200"/>
+            <a:off x="731520" y="365760"/>
+            <a:ext cx="10728655" cy="822960"/>
           </a:xfrm>
           <a:prstGeom prst="rect">
             <a:avLst/>
@@ -4728,89 +8223,254 @@
           <a:noFill/>
         </p:spPr>
         <p:txBody>
-          <a:bodyPr wrap="square">
+          <a:bodyPr wrap="square" lIns="0" tIns="0" rIns="0" bIns="0">
             <a:spAutoFit/>
           </a:bodyPr>
           <a:lstStyle/>
           <a:p>
+            <a:r>
+              <a:rPr b="1" sz="1000">
+                <a:solidFill>
+                  <a:srgbClr val="6366F1"/>
+                </a:solidFill>
+              </a:rPr>
+              <a:t>LIVE VERIFICATION FLOW • PROJECT-042</a:t>
+            </a:r>
+          </a:p>
+          <a:p>
+            <a:r>
+              <a:rPr b="1" sz="2000">
+                <a:solidFill>
+                  <a:srgbClr val="0F172A"/>
+                </a:solidFill>
+              </a:rPr>
+              <a:t>Genuine Biometric Verification: Alex Chen (STU-101)</a:t>
+            </a:r>
+          </a:p>
+        </p:txBody>
+      </p:sp>
+      <p:pic>
+        <p:nvPicPr>
+          <p:cNvPr id="3" name="Picture 2" descr="04_genuine_alex_chen_verification.png"/>
+          <p:cNvPicPr>
+            <a:picLocks noChangeAspect="1"/>
+          </p:cNvPicPr>
+          <p:nvPr/>
+        </p:nvPicPr>
+        <p:blipFill>
+          <a:blip r:embed="rId2"/>
+          <a:stretch>
+            <a:fillRect/>
+          </a:stretch>
+        </p:blipFill>
+        <p:spPr>
+          <a:xfrm>
+            <a:off x="731520" y="1371600"/>
+            <a:ext cx="6583680" cy="4937760"/>
+          </a:xfrm>
+          <a:prstGeom prst="rect">
+            <a:avLst/>
+          </a:prstGeom>
+        </p:spPr>
+      </p:pic>
+      <p:sp>
+        <p:nvSpPr>
+          <p:cNvPr id="4" name="Rectangle 3"/>
+          <p:cNvSpPr/>
+          <p:nvPr/>
+        </p:nvSpPr>
+        <p:spPr>
+          <a:xfrm>
+            <a:off x="7589520" y="1371600"/>
+            <a:ext cx="3840480" cy="4937760"/>
+          </a:xfrm>
+          <a:prstGeom prst="rect">
+            <a:avLst/>
+          </a:prstGeom>
+          <a:solidFill>
+            <a:srgbClr val="FFFFFF"/>
+          </a:solidFill>
+          <a:ln w="12700">
+            <a:solidFill>
+              <a:srgbClr val="E2E8F0"/>
+            </a:solidFill>
+          </a:ln>
+        </p:spPr>
+        <p:style>
+          <a:lnRef idx="1">
+            <a:schemeClr val="accent1"/>
+          </a:lnRef>
+          <a:fillRef idx="3">
+            <a:schemeClr val="accent1"/>
+          </a:fillRef>
+          <a:effectRef idx="2">
+            <a:schemeClr val="accent1"/>
+          </a:effectRef>
+          <a:fontRef idx="minor">
+            <a:schemeClr val="lt1"/>
+          </a:fontRef>
+        </p:style>
+        <p:txBody>
+          <a:bodyPr rtlCol="0" anchor="ctr"/>
+          <a:lstStyle/>
+          <a:p>
+            <a:pPr algn="ctr"/>
+          </a:p>
+        </p:txBody>
+      </p:sp>
+      <p:sp>
+        <p:nvSpPr>
+          <p:cNvPr id="5" name="TextBox 4"/>
+          <p:cNvSpPr txBox="1"/>
+          <p:nvPr/>
+        </p:nvSpPr>
+        <p:spPr>
+          <a:xfrm>
+            <a:off x="7772400" y="1554480"/>
+            <a:ext cx="3474720" cy="4572000"/>
+          </a:xfrm>
+          <a:prstGeom prst="rect">
+            <a:avLst/>
+          </a:prstGeom>
+          <a:noFill/>
+        </p:spPr>
+        <p:txBody>
+          <a:bodyPr wrap="square" lIns="0" tIns="0" rIns="0" bIns="0">
+            <a:spAutoFit/>
+          </a:bodyPr>
+          <a:lstStyle/>
+          <a:p>
+            <a:r>
+              <a:rPr b="1" sz="1400">
+                <a:solidFill>
+                  <a:srgbClr val="0F172A"/>
+                </a:solidFill>
+              </a:rPr>
+              <a:t>Verified Genuine Audit Metrics</a:t>
+            </a:r>
+          </a:p>
+          <a:p>
             <a:pPr>
               <a:spcBef>
-                <a:spcPts val="1000"/>
+                <a:spcPts val="600"/>
               </a:spcBef>
-              <a:defRPr sz="1500" b="1">
-                <a:solidFill>
-                  <a:srgbClr val="0F172A"/>
-                </a:solidFill>
-              </a:defRPr>
             </a:pPr>
             <a:r>
-              <a:t>■ Project Accomplishments</a:t>
-            </a:r>
-          </a:p>
-          <a:p>
-            <a:pPr>
-              <a:defRPr sz="1300">
-                <a:solidFill>
-                  <a:srgbClr val="475569"/>
-                </a:solidFill>
-              </a:defRPr>
-            </a:pPr>
-            <a:r>
-              <a:t>Engineered a robust, end-to-end prototype validating the initial abstract with reproducible experiments.</a:t>
+              <a:rPr b="1" sz="1100">
+                <a:solidFill>
+                  <a:srgbClr val="6366F1"/>
+                </a:solidFill>
+              </a:rPr>
+              <a:t>• </a:t>
+            </a:r>
+            <a:r>
+              <a:rPr b="1" sz="1100">
+                <a:solidFill>
+                  <a:srgbClr val="1E293B"/>
+                </a:solidFill>
+              </a:rPr>
+              <a:t>Access Decision: GRANTED: </a:t>
+            </a:r>
+            <a:r>
+              <a:rPr sz="1100">
+                <a:solidFill>
+                  <a:srgbClr val="64748B"/>
+                </a:solidFill>
+              </a:rPr>
+              <a:t>Instant turnstile unlock signal dispatched upon positive dual-model confirmation.</a:t>
             </a:r>
           </a:p>
           <a:p>
             <a:pPr>
               <a:spcBef>
-                <a:spcPts val="1000"/>
+                <a:spcPts val="600"/>
               </a:spcBef>
-              <a:defRPr sz="1500" b="1">
-                <a:solidFill>
-                  <a:srgbClr val="0F172A"/>
-                </a:solidFill>
-              </a:defRPr>
             </a:pPr>
             <a:r>
-              <a:t>■ Industrial Significance</a:t>
-            </a:r>
-          </a:p>
-          <a:p>
-            <a:pPr>
-              <a:defRPr sz="1300">
-                <a:solidFill>
-                  <a:srgbClr val="475569"/>
-                </a:solidFill>
-              </a:defRPr>
-            </a:pPr>
-            <a:r>
-              <a:t>Eliminates latency and manual friction while ensuring high confidence automated decision support.</a:t>
+              <a:rPr b="1" sz="1100">
+                <a:solidFill>
+                  <a:srgbClr val="6366F1"/>
+                </a:solidFill>
+              </a:rPr>
+              <a:t>• </a:t>
+            </a:r>
+            <a:r>
+              <a:rPr b="1" sz="1100">
+                <a:solidFill>
+                  <a:srgbClr val="1E293B"/>
+                </a:solidFill>
+              </a:rPr>
+              <a:t>ArcFace Identity Match: </a:t>
+            </a:r>
+            <a:r>
+              <a:rPr sz="1100">
+                <a:solidFill>
+                  <a:srgbClr val="64748B"/>
+                </a:solidFill>
+              </a:rPr>
+              <a:t>96.5% biometric match confidence against enrolled institutional embedding.</a:t>
             </a:r>
           </a:p>
           <a:p>
             <a:pPr>
               <a:spcBef>
-                <a:spcPts val="1000"/>
+                <a:spcPts val="600"/>
               </a:spcBef>
-              <a:defRPr sz="1500" b="1">
-                <a:solidFill>
-                  <a:srgbClr val="0F172A"/>
-                </a:solidFill>
-              </a:defRPr>
             </a:pPr>
             <a:r>
-              <a:t>■ Future Scope &amp; Extensions</a:t>
+              <a:rPr b="1" sz="1100">
+                <a:solidFill>
+                  <a:srgbClr val="6366F1"/>
+                </a:solidFill>
+              </a:rPr>
+              <a:t>• </a:t>
+            </a:r>
+            <a:r>
+              <a:rPr b="1" sz="1100">
+                <a:solidFill>
+                  <a:srgbClr val="1E293B"/>
+                </a:solidFill>
+              </a:rPr>
+              <a:t>Liveness Score &amp; Low Risk: </a:t>
+            </a:r>
+            <a:r>
+              <a:rPr sz="1100">
+                <a:solidFill>
+                  <a:srgbClr val="64748B"/>
+                </a:solidFill>
+              </a:rPr>
+              <a:t>Spoof Risk: 2.53% | Micro-Tremor: 0.817 | Illumination Entropy: 8.00 pts.</a:t>
             </a:r>
           </a:p>
           <a:p>
             <a:pPr>
-              <a:defRPr sz="1300">
-                <a:solidFill>
-                  <a:srgbClr val="475569"/>
-                </a:solidFill>
-              </a:defRPr>
+              <a:spcBef>
+                <a:spcPts val="600"/>
+              </a:spcBef>
             </a:pPr>
             <a:r>
-              <a:t>Integration with federated edge sensors, distributed multi-tenant cloud clustering, and automated active learning.</a:t>
+              <a:rPr b="1" sz="1100">
+                <a:solidFill>
+                  <a:srgbClr val="6366F1"/>
+                </a:solidFill>
+              </a:rPr>
+              <a:t>• </a:t>
+            </a:r>
+            <a:r>
+              <a:rPr b="1" sz="1100">
+                <a:solidFill>
+                  <a:srgbClr val="1E293B"/>
+                </a:solidFill>
+              </a:rPr>
+              <a:t>Cryptographic Evidence Hash: </a:t>
+            </a:r>
+            <a:r>
+              <a:rPr sz="1100">
+                <a:solidFill>
+                  <a:srgbClr val="64748B"/>
+                </a:solidFill>
+              </a:rPr>
+              <a:t>SHA-256 biometric fingerprint hash generated and bound into institutional attendance ledger.</a:t>
             </a:r>
           </a:p>
         </p:txBody>
